--- a/LG_부트캠프_12기_C반_프로젝트일정_및_최종제출결과물_3팀/LG_부트캠프_12기_C반_최종결과물(3팀)/포스터/LG_부트캠프_12기_C반_3팀_포스터_v1.pptx
+++ b/LG_부트캠프_12기_C반_프로젝트일정_및_최종제출결과물_3팀/LG_부트캠프_12기_C반_최종결과물(3팀)/포스터/LG_부트캠프_12기_C반_3팀_포스터_v1.pptx
@@ -8,7 +8,7 @@
     <p:sldId id="262" r:id="rId2"/>
     <p:sldId id="264" r:id="rId3"/>
   </p:sldIdLst>
-  <p:sldSz cx="11315700" cy="16002000"/>
+  <p:sldSz cx="6858000" cy="9906000" type="A4"/>
   <p:notesSz cx="6858000" cy="9144000"/>
   <p:embeddedFontLst>
     <p:embeddedFont>
@@ -32,8 +32,8 @@
     <a:defPPr>
       <a:defRPr lang="en-US"/>
     </a:defPPr>
-    <a:lvl1pPr marL="0" algn="l" defTabSz="914400" rtl="0" eaLnBrk="1" latinLnBrk="0" hangingPunct="1">
-      <a:defRPr sz="1800" kern="1200">
+    <a:lvl1pPr marL="0" algn="l" defTabSz="560998" rtl="0" eaLnBrk="1" latinLnBrk="0" hangingPunct="1">
+      <a:defRPr sz="1104" kern="1200">
         <a:solidFill>
           <a:schemeClr val="tx1"/>
         </a:solidFill>
@@ -42,8 +42,8 @@
         <a:cs typeface="+mn-cs"/>
       </a:defRPr>
     </a:lvl1pPr>
-    <a:lvl2pPr marL="457200" algn="l" defTabSz="914400" rtl="0" eaLnBrk="1" latinLnBrk="0" hangingPunct="1">
-      <a:defRPr sz="1800" kern="1200">
+    <a:lvl2pPr marL="280499" algn="l" defTabSz="560998" rtl="0" eaLnBrk="1" latinLnBrk="0" hangingPunct="1">
+      <a:defRPr sz="1104" kern="1200">
         <a:solidFill>
           <a:schemeClr val="tx1"/>
         </a:solidFill>
@@ -52,8 +52,8 @@
         <a:cs typeface="+mn-cs"/>
       </a:defRPr>
     </a:lvl2pPr>
-    <a:lvl3pPr marL="914400" algn="l" defTabSz="914400" rtl="0" eaLnBrk="1" latinLnBrk="0" hangingPunct="1">
-      <a:defRPr sz="1800" kern="1200">
+    <a:lvl3pPr marL="560998" algn="l" defTabSz="560998" rtl="0" eaLnBrk="1" latinLnBrk="0" hangingPunct="1">
+      <a:defRPr sz="1104" kern="1200">
         <a:solidFill>
           <a:schemeClr val="tx1"/>
         </a:solidFill>
@@ -62,8 +62,8 @@
         <a:cs typeface="+mn-cs"/>
       </a:defRPr>
     </a:lvl3pPr>
-    <a:lvl4pPr marL="1371600" algn="l" defTabSz="914400" rtl="0" eaLnBrk="1" latinLnBrk="0" hangingPunct="1">
-      <a:defRPr sz="1800" kern="1200">
+    <a:lvl4pPr marL="841497" algn="l" defTabSz="560998" rtl="0" eaLnBrk="1" latinLnBrk="0" hangingPunct="1">
+      <a:defRPr sz="1104" kern="1200">
         <a:solidFill>
           <a:schemeClr val="tx1"/>
         </a:solidFill>
@@ -72,8 +72,8 @@
         <a:cs typeface="+mn-cs"/>
       </a:defRPr>
     </a:lvl4pPr>
-    <a:lvl5pPr marL="1828800" algn="l" defTabSz="914400" rtl="0" eaLnBrk="1" latinLnBrk="0" hangingPunct="1">
-      <a:defRPr sz="1800" kern="1200">
+    <a:lvl5pPr marL="1121996" algn="l" defTabSz="560998" rtl="0" eaLnBrk="1" latinLnBrk="0" hangingPunct="1">
+      <a:defRPr sz="1104" kern="1200">
         <a:solidFill>
           <a:schemeClr val="tx1"/>
         </a:solidFill>
@@ -82,8 +82,8 @@
         <a:cs typeface="+mn-cs"/>
       </a:defRPr>
     </a:lvl5pPr>
-    <a:lvl6pPr marL="2286000" algn="l" defTabSz="914400" rtl="0" eaLnBrk="1" latinLnBrk="0" hangingPunct="1">
-      <a:defRPr sz="1800" kern="1200">
+    <a:lvl6pPr marL="1402495" algn="l" defTabSz="560998" rtl="0" eaLnBrk="1" latinLnBrk="0" hangingPunct="1">
+      <a:defRPr sz="1104" kern="1200">
         <a:solidFill>
           <a:schemeClr val="tx1"/>
         </a:solidFill>
@@ -92,8 +92,8 @@
         <a:cs typeface="+mn-cs"/>
       </a:defRPr>
     </a:lvl6pPr>
-    <a:lvl7pPr marL="2743200" algn="l" defTabSz="914400" rtl="0" eaLnBrk="1" latinLnBrk="0" hangingPunct="1">
-      <a:defRPr sz="1800" kern="1200">
+    <a:lvl7pPr marL="1682994" algn="l" defTabSz="560998" rtl="0" eaLnBrk="1" latinLnBrk="0" hangingPunct="1">
+      <a:defRPr sz="1104" kern="1200">
         <a:solidFill>
           <a:schemeClr val="tx1"/>
         </a:solidFill>
@@ -102,8 +102,8 @@
         <a:cs typeface="+mn-cs"/>
       </a:defRPr>
     </a:lvl7pPr>
-    <a:lvl8pPr marL="3200400" algn="l" defTabSz="914400" rtl="0" eaLnBrk="1" latinLnBrk="0" hangingPunct="1">
-      <a:defRPr sz="1800" kern="1200">
+    <a:lvl8pPr marL="1963492" algn="l" defTabSz="560998" rtl="0" eaLnBrk="1" latinLnBrk="0" hangingPunct="1">
+      <a:defRPr sz="1104" kern="1200">
         <a:solidFill>
           <a:schemeClr val="tx1"/>
         </a:solidFill>
@@ -112,8 +112,8 @@
         <a:cs typeface="+mn-cs"/>
       </a:defRPr>
     </a:lvl8pPr>
-    <a:lvl9pPr marL="3657600" algn="l" defTabSz="914400" rtl="0" eaLnBrk="1" latinLnBrk="0" hangingPunct="1">
-      <a:defRPr sz="1800" kern="1200">
+    <a:lvl9pPr marL="2243992" algn="l" defTabSz="560998" rtl="0" eaLnBrk="1" latinLnBrk="0" hangingPunct="1">
+      <a:defRPr sz="1104" kern="1200">
         <a:solidFill>
           <a:schemeClr val="tx1"/>
         </a:solidFill>
@@ -126,12 +126,12 @@
   <p:extLst>
     <p:ext uri="{EFAFB233-063F-42B5-8137-9DF3F51BA10A}">
       <p15:sldGuideLst xmlns:p15="http://schemas.microsoft.com/office/powerpoint/2012/main">
-        <p15:guide id="1" orient="horz" pos="5376" userDrawn="1">
+        <p15:guide id="1" orient="horz" pos="3328" userDrawn="1">
           <p15:clr>
             <a:srgbClr val="A4A3A4"/>
           </p15:clr>
         </p15:guide>
-        <p15:guide id="2" pos="3564" userDrawn="1">
+        <p15:guide id="2" pos="2160" userDrawn="1">
           <p15:clr>
             <a:srgbClr val="A4A3A4"/>
           </p15:clr>
@@ -171,8 +171,8 @@
         </p:nvSpPr>
         <p:spPr>
           <a:xfrm>
-            <a:off x="685800" y="2130425"/>
-            <a:ext cx="7772400" cy="1470025"/>
+            <a:off x="415638" y="1318836"/>
+            <a:ext cx="4710545" cy="910015"/>
           </a:xfrm>
         </p:spPr>
         <p:txBody>
@@ -198,8 +198,8 @@
         </p:nvSpPr>
         <p:spPr>
           <a:xfrm>
-            <a:off x="1371600" y="3886200"/>
-            <a:ext cx="6400800" cy="1752600"/>
+            <a:off x="831274" y="2405743"/>
+            <a:ext cx="3879273" cy="1084943"/>
           </a:xfrm>
         </p:spPr>
         <p:txBody>
@@ -215,7 +215,7 @@
                 </a:solidFill>
               </a:defRPr>
             </a:lvl1pPr>
-            <a:lvl2pPr marL="457200" indent="0" algn="ctr">
+            <a:lvl2pPr marL="277127" indent="0" algn="ctr">
               <a:buNone/>
               <a:defRPr>
                 <a:solidFill>
@@ -225,7 +225,7 @@
                 </a:solidFill>
               </a:defRPr>
             </a:lvl2pPr>
-            <a:lvl3pPr marL="914400" indent="0" algn="ctr">
+            <a:lvl3pPr marL="554254" indent="0" algn="ctr">
               <a:buNone/>
               <a:defRPr>
                 <a:solidFill>
@@ -235,7 +235,7 @@
                 </a:solidFill>
               </a:defRPr>
             </a:lvl3pPr>
-            <a:lvl4pPr marL="1371600" indent="0" algn="ctr">
+            <a:lvl4pPr marL="831381" indent="0" algn="ctr">
               <a:buNone/>
               <a:defRPr>
                 <a:solidFill>
@@ -245,7 +245,7 @@
                 </a:solidFill>
               </a:defRPr>
             </a:lvl4pPr>
-            <a:lvl5pPr marL="1828800" indent="0" algn="ctr">
+            <a:lvl5pPr marL="1108508" indent="0" algn="ctr">
               <a:buNone/>
               <a:defRPr>
                 <a:solidFill>
@@ -255,7 +255,7 @@
                 </a:solidFill>
               </a:defRPr>
             </a:lvl5pPr>
-            <a:lvl6pPr marL="2286000" indent="0" algn="ctr">
+            <a:lvl6pPr marL="1385635" indent="0" algn="ctr">
               <a:buNone/>
               <a:defRPr>
                 <a:solidFill>
@@ -265,7 +265,7 @@
                 </a:solidFill>
               </a:defRPr>
             </a:lvl6pPr>
-            <a:lvl7pPr marL="2743200" indent="0" algn="ctr">
+            <a:lvl7pPr marL="1662762" indent="0" algn="ctr">
               <a:buNone/>
               <a:defRPr>
                 <a:solidFill>
@@ -275,7 +275,7 @@
                 </a:solidFill>
               </a:defRPr>
             </a:lvl7pPr>
-            <a:lvl8pPr marL="3200400" indent="0" algn="ctr">
+            <a:lvl8pPr marL="1939888" indent="0" algn="ctr">
               <a:buNone/>
               <a:defRPr>
                 <a:solidFill>
@@ -285,7 +285,7 @@
                 </a:solidFill>
               </a:defRPr>
             </a:lvl8pPr>
-            <a:lvl9pPr marL="3657600" indent="0" algn="ctr">
+            <a:lvl9pPr marL="2217015" indent="0" algn="ctr">
               <a:buNone/>
               <a:defRPr>
                 <a:solidFill>
@@ -322,7 +322,7 @@
             <a:fld id="{1D8BD707-D9CF-40AE-B4C6-C98DA3205C09}" type="datetimeFigureOut">
               <a:rPr lang="en-US" smtClean="0"/>
               <a:pPr/>
-              <a:t>4/21/2026</a:t>
+              <a:t>4/22/2026</a:t>
             </a:fld>
             <a:endParaRPr lang="en-US"/>
           </a:p>
@@ -487,7 +487,7 @@
             <a:fld id="{1D8BD707-D9CF-40AE-B4C6-C98DA3205C09}" type="datetimeFigureOut">
               <a:rPr lang="en-US" smtClean="0"/>
               <a:pPr/>
-              <a:t>4/21/2026</a:t>
+              <a:t>4/22/2026</a:t>
             </a:fld>
             <a:endParaRPr lang="en-US"/>
           </a:p>
@@ -573,8 +573,8 @@
         </p:nvSpPr>
         <p:spPr>
           <a:xfrm>
-            <a:off x="6629400" y="274638"/>
-            <a:ext cx="2057400" cy="5851525"/>
+            <a:off x="4017818" y="170015"/>
+            <a:ext cx="1246909" cy="3622373"/>
           </a:xfrm>
         </p:spPr>
         <p:txBody>
@@ -600,8 +600,8 @@
         </p:nvSpPr>
         <p:spPr>
           <a:xfrm>
-            <a:off x="457200" y="274638"/>
-            <a:ext cx="6019800" cy="5851525"/>
+            <a:off x="277091" y="170015"/>
+            <a:ext cx="3648364" cy="3622373"/>
           </a:xfrm>
         </p:spPr>
         <p:txBody>
@@ -662,7 +662,7 @@
             <a:fld id="{1D8BD707-D9CF-40AE-B4C6-C98DA3205C09}" type="datetimeFigureOut">
               <a:rPr lang="en-US" smtClean="0"/>
               <a:pPr/>
-              <a:t>4/21/2026</a:t>
+              <a:t>4/22/2026</a:t>
             </a:fld>
             <a:endParaRPr lang="en-US"/>
           </a:p>
@@ -827,7 +827,7 @@
             <a:fld id="{1D8BD707-D9CF-40AE-B4C6-C98DA3205C09}" type="datetimeFigureOut">
               <a:rPr lang="en-US" smtClean="0"/>
               <a:pPr/>
-              <a:t>4/21/2026</a:t>
+              <a:t>4/22/2026</a:t>
             </a:fld>
             <a:endParaRPr lang="en-US"/>
           </a:p>
@@ -913,15 +913,15 @@
         </p:nvSpPr>
         <p:spPr>
           <a:xfrm>
-            <a:off x="722313" y="4406900"/>
-            <a:ext cx="7772400" cy="1362075"/>
+            <a:off x="437767" y="2728082"/>
+            <a:ext cx="4710545" cy="843189"/>
           </a:xfrm>
         </p:spPr>
         <p:txBody>
           <a:bodyPr anchor="t"/>
           <a:lstStyle>
             <a:lvl1pPr algn="l">
-              <a:defRPr sz="4000" b="1" cap="all"/>
+              <a:defRPr sz="2424" b="1" cap="all"/>
             </a:lvl1pPr>
           </a:lstStyle>
           <a:p>
@@ -944,8 +944,8 @@
         </p:nvSpPr>
         <p:spPr>
           <a:xfrm>
-            <a:off x="722313" y="2906713"/>
-            <a:ext cx="7772400" cy="1500187"/>
+            <a:off x="437767" y="1799395"/>
+            <a:ext cx="4710545" cy="928687"/>
           </a:xfrm>
         </p:spPr>
         <p:txBody>
@@ -953,7 +953,7 @@
           <a:lstStyle>
             <a:lvl1pPr marL="0" indent="0">
               <a:buNone/>
-              <a:defRPr sz="2000">
+              <a:defRPr sz="1212">
                 <a:solidFill>
                   <a:schemeClr val="tx1">
                     <a:tint val="75000"/>
@@ -961,9 +961,9 @@
                 </a:solidFill>
               </a:defRPr>
             </a:lvl1pPr>
-            <a:lvl2pPr marL="457200" indent="0">
+            <a:lvl2pPr marL="277127" indent="0">
               <a:buNone/>
-              <a:defRPr sz="1800">
+              <a:defRPr sz="1091">
                 <a:solidFill>
                   <a:schemeClr val="tx1">
                     <a:tint val="75000"/>
@@ -971,9 +971,9 @@
                 </a:solidFill>
               </a:defRPr>
             </a:lvl2pPr>
-            <a:lvl3pPr marL="914400" indent="0">
+            <a:lvl3pPr marL="554254" indent="0">
               <a:buNone/>
-              <a:defRPr sz="1600">
+              <a:defRPr sz="970">
                 <a:solidFill>
                   <a:schemeClr val="tx1">
                     <a:tint val="75000"/>
@@ -981,9 +981,9 @@
                 </a:solidFill>
               </a:defRPr>
             </a:lvl3pPr>
-            <a:lvl4pPr marL="1371600" indent="0">
+            <a:lvl4pPr marL="831381" indent="0">
               <a:buNone/>
-              <a:defRPr sz="1400">
+              <a:defRPr sz="849">
                 <a:solidFill>
                   <a:schemeClr val="tx1">
                     <a:tint val="75000"/>
@@ -991,9 +991,9 @@
                 </a:solidFill>
               </a:defRPr>
             </a:lvl4pPr>
-            <a:lvl5pPr marL="1828800" indent="0">
+            <a:lvl5pPr marL="1108508" indent="0">
               <a:buNone/>
-              <a:defRPr sz="1400">
+              <a:defRPr sz="849">
                 <a:solidFill>
                   <a:schemeClr val="tx1">
                     <a:tint val="75000"/>
@@ -1001,9 +1001,9 @@
                 </a:solidFill>
               </a:defRPr>
             </a:lvl5pPr>
-            <a:lvl6pPr marL="2286000" indent="0">
+            <a:lvl6pPr marL="1385635" indent="0">
               <a:buNone/>
-              <a:defRPr sz="1400">
+              <a:defRPr sz="849">
                 <a:solidFill>
                   <a:schemeClr val="tx1">
                     <a:tint val="75000"/>
@@ -1011,9 +1011,9 @@
                 </a:solidFill>
               </a:defRPr>
             </a:lvl6pPr>
-            <a:lvl7pPr marL="2743200" indent="0">
+            <a:lvl7pPr marL="1662762" indent="0">
               <a:buNone/>
-              <a:defRPr sz="1400">
+              <a:defRPr sz="849">
                 <a:solidFill>
                   <a:schemeClr val="tx1">
                     <a:tint val="75000"/>
@@ -1021,9 +1021,9 @@
                 </a:solidFill>
               </a:defRPr>
             </a:lvl7pPr>
-            <a:lvl8pPr marL="3200400" indent="0">
+            <a:lvl8pPr marL="1939888" indent="0">
               <a:buNone/>
-              <a:defRPr sz="1400">
+              <a:defRPr sz="849">
                 <a:solidFill>
                   <a:schemeClr val="tx1">
                     <a:tint val="75000"/>
@@ -1031,9 +1031,9 @@
                 </a:solidFill>
               </a:defRPr>
             </a:lvl8pPr>
-            <a:lvl9pPr marL="3657600" indent="0">
+            <a:lvl9pPr marL="2217015" indent="0">
               <a:buNone/>
-              <a:defRPr sz="1400">
+              <a:defRPr sz="849">
                 <a:solidFill>
                   <a:schemeClr val="tx1">
                     <a:tint val="75000"/>
@@ -1069,7 +1069,7 @@
             <a:fld id="{1D8BD707-D9CF-40AE-B4C6-C98DA3205C09}" type="datetimeFigureOut">
               <a:rPr lang="en-US" smtClean="0"/>
               <a:pPr/>
-              <a:t>4/21/2026</a:t>
+              <a:t>4/22/2026</a:t>
             </a:fld>
             <a:endParaRPr lang="en-US"/>
           </a:p>
@@ -1177,39 +1177,39 @@
         </p:nvSpPr>
         <p:spPr>
           <a:xfrm>
-            <a:off x="457200" y="1600200"/>
-            <a:ext cx="4038600" cy="4525963"/>
+            <a:off x="277091" y="990601"/>
+            <a:ext cx="2447636" cy="2801787"/>
           </a:xfrm>
         </p:spPr>
         <p:txBody>
           <a:bodyPr/>
           <a:lstStyle>
             <a:lvl1pPr>
-              <a:defRPr sz="2800"/>
+              <a:defRPr sz="1697"/>
             </a:lvl1pPr>
             <a:lvl2pPr>
-              <a:defRPr sz="2400"/>
+              <a:defRPr sz="1455"/>
             </a:lvl2pPr>
             <a:lvl3pPr>
-              <a:defRPr sz="2000"/>
+              <a:defRPr sz="1212"/>
             </a:lvl3pPr>
             <a:lvl4pPr>
-              <a:defRPr sz="1800"/>
+              <a:defRPr sz="1091"/>
             </a:lvl4pPr>
             <a:lvl5pPr>
-              <a:defRPr sz="1800"/>
+              <a:defRPr sz="1091"/>
             </a:lvl5pPr>
             <a:lvl6pPr>
-              <a:defRPr sz="1800"/>
+              <a:defRPr sz="1091"/>
             </a:lvl6pPr>
             <a:lvl7pPr>
-              <a:defRPr sz="1800"/>
+              <a:defRPr sz="1091"/>
             </a:lvl7pPr>
             <a:lvl8pPr>
-              <a:defRPr sz="1800"/>
+              <a:defRPr sz="1091"/>
             </a:lvl8pPr>
             <a:lvl9pPr>
-              <a:defRPr sz="1800"/>
+              <a:defRPr sz="1091"/>
             </a:lvl9pPr>
           </a:lstStyle>
           <a:p>
@@ -1261,39 +1261,39 @@
         </p:nvSpPr>
         <p:spPr>
           <a:xfrm>
-            <a:off x="4648200" y="1600200"/>
-            <a:ext cx="4038600" cy="4525963"/>
+            <a:off x="2817091" y="990601"/>
+            <a:ext cx="2447636" cy="2801787"/>
           </a:xfrm>
         </p:spPr>
         <p:txBody>
           <a:bodyPr/>
           <a:lstStyle>
             <a:lvl1pPr>
-              <a:defRPr sz="2800"/>
+              <a:defRPr sz="1697"/>
             </a:lvl1pPr>
             <a:lvl2pPr>
-              <a:defRPr sz="2400"/>
+              <a:defRPr sz="1455"/>
             </a:lvl2pPr>
             <a:lvl3pPr>
-              <a:defRPr sz="2000"/>
+              <a:defRPr sz="1212"/>
             </a:lvl3pPr>
             <a:lvl4pPr>
-              <a:defRPr sz="1800"/>
+              <a:defRPr sz="1091"/>
             </a:lvl4pPr>
             <a:lvl5pPr>
-              <a:defRPr sz="1800"/>
+              <a:defRPr sz="1091"/>
             </a:lvl5pPr>
             <a:lvl6pPr>
-              <a:defRPr sz="1800"/>
+              <a:defRPr sz="1091"/>
             </a:lvl6pPr>
             <a:lvl7pPr>
-              <a:defRPr sz="1800"/>
+              <a:defRPr sz="1091"/>
             </a:lvl7pPr>
             <a:lvl8pPr>
-              <a:defRPr sz="1800"/>
+              <a:defRPr sz="1091"/>
             </a:lvl8pPr>
             <a:lvl9pPr>
-              <a:defRPr sz="1800"/>
+              <a:defRPr sz="1091"/>
             </a:lvl9pPr>
           </a:lstStyle>
           <a:p>
@@ -1351,7 +1351,7 @@
             <a:fld id="{1D8BD707-D9CF-40AE-B4C6-C98DA3205C09}" type="datetimeFigureOut">
               <a:rPr lang="en-US" smtClean="0"/>
               <a:pPr/>
-              <a:t>4/21/2026</a:t>
+              <a:t>4/22/2026</a:t>
             </a:fld>
             <a:endParaRPr lang="en-US"/>
           </a:p>
@@ -1463,8 +1463,8 @@
         </p:nvSpPr>
         <p:spPr>
           <a:xfrm>
-            <a:off x="457200" y="1535113"/>
-            <a:ext cx="4040188" cy="639762"/>
+            <a:off x="277091" y="950309"/>
+            <a:ext cx="2448599" cy="396043"/>
           </a:xfrm>
         </p:spPr>
         <p:txBody>
@@ -1472,39 +1472,39 @@
           <a:lstStyle>
             <a:lvl1pPr marL="0" indent="0">
               <a:buNone/>
-              <a:defRPr sz="2400" b="1"/>
+              <a:defRPr sz="1455" b="1"/>
             </a:lvl1pPr>
-            <a:lvl2pPr marL="457200" indent="0">
+            <a:lvl2pPr marL="277127" indent="0">
               <a:buNone/>
-              <a:defRPr sz="2000" b="1"/>
+              <a:defRPr sz="1212" b="1"/>
             </a:lvl2pPr>
-            <a:lvl3pPr marL="914400" indent="0">
+            <a:lvl3pPr marL="554254" indent="0">
               <a:buNone/>
-              <a:defRPr sz="1800" b="1"/>
+              <a:defRPr sz="1091" b="1"/>
             </a:lvl3pPr>
-            <a:lvl4pPr marL="1371600" indent="0">
+            <a:lvl4pPr marL="831381" indent="0">
               <a:buNone/>
-              <a:defRPr sz="1600" b="1"/>
+              <a:defRPr sz="970" b="1"/>
             </a:lvl4pPr>
-            <a:lvl5pPr marL="1828800" indent="0">
+            <a:lvl5pPr marL="1108508" indent="0">
               <a:buNone/>
-              <a:defRPr sz="1600" b="1"/>
+              <a:defRPr sz="970" b="1"/>
             </a:lvl5pPr>
-            <a:lvl6pPr marL="2286000" indent="0">
+            <a:lvl6pPr marL="1385635" indent="0">
               <a:buNone/>
-              <a:defRPr sz="1600" b="1"/>
+              <a:defRPr sz="970" b="1"/>
             </a:lvl6pPr>
-            <a:lvl7pPr marL="2743200" indent="0">
+            <a:lvl7pPr marL="1662762" indent="0">
               <a:buNone/>
-              <a:defRPr sz="1600" b="1"/>
+              <a:defRPr sz="970" b="1"/>
             </a:lvl7pPr>
-            <a:lvl8pPr marL="3200400" indent="0">
+            <a:lvl8pPr marL="1939888" indent="0">
               <a:buNone/>
-              <a:defRPr sz="1600" b="1"/>
+              <a:defRPr sz="970" b="1"/>
             </a:lvl8pPr>
-            <a:lvl9pPr marL="3657600" indent="0">
+            <a:lvl9pPr marL="2217015" indent="0">
               <a:buNone/>
-              <a:defRPr sz="1600" b="1"/>
+              <a:defRPr sz="970" b="1"/>
             </a:lvl9pPr>
           </a:lstStyle>
           <a:p>
@@ -1528,39 +1528,39 @@
         </p:nvSpPr>
         <p:spPr>
           <a:xfrm>
-            <a:off x="457200" y="2174875"/>
-            <a:ext cx="4040188" cy="3951288"/>
+            <a:off x="277091" y="1346352"/>
+            <a:ext cx="2448599" cy="2446035"/>
           </a:xfrm>
         </p:spPr>
         <p:txBody>
           <a:bodyPr/>
           <a:lstStyle>
             <a:lvl1pPr>
-              <a:defRPr sz="2400"/>
+              <a:defRPr sz="1455"/>
             </a:lvl1pPr>
             <a:lvl2pPr>
-              <a:defRPr sz="2000"/>
+              <a:defRPr sz="1212"/>
             </a:lvl2pPr>
             <a:lvl3pPr>
-              <a:defRPr sz="1800"/>
+              <a:defRPr sz="1091"/>
             </a:lvl3pPr>
             <a:lvl4pPr>
-              <a:defRPr sz="1600"/>
+              <a:defRPr sz="970"/>
             </a:lvl4pPr>
             <a:lvl5pPr>
-              <a:defRPr sz="1600"/>
+              <a:defRPr sz="970"/>
             </a:lvl5pPr>
             <a:lvl6pPr>
-              <a:defRPr sz="1600"/>
+              <a:defRPr sz="970"/>
             </a:lvl6pPr>
             <a:lvl7pPr>
-              <a:defRPr sz="1600"/>
+              <a:defRPr sz="970"/>
             </a:lvl7pPr>
             <a:lvl8pPr>
-              <a:defRPr sz="1600"/>
+              <a:defRPr sz="970"/>
             </a:lvl8pPr>
             <a:lvl9pPr>
-              <a:defRPr sz="1600"/>
+              <a:defRPr sz="970"/>
             </a:lvl9pPr>
           </a:lstStyle>
           <a:p>
@@ -1612,8 +1612,8 @@
         </p:nvSpPr>
         <p:spPr>
           <a:xfrm>
-            <a:off x="4645025" y="1535113"/>
-            <a:ext cx="4041775" cy="639762"/>
+            <a:off x="2815167" y="950309"/>
+            <a:ext cx="2449561" cy="396043"/>
           </a:xfrm>
         </p:spPr>
         <p:txBody>
@@ -1621,39 +1621,39 @@
           <a:lstStyle>
             <a:lvl1pPr marL="0" indent="0">
               <a:buNone/>
-              <a:defRPr sz="2400" b="1"/>
+              <a:defRPr sz="1455" b="1"/>
             </a:lvl1pPr>
-            <a:lvl2pPr marL="457200" indent="0">
+            <a:lvl2pPr marL="277127" indent="0">
               <a:buNone/>
-              <a:defRPr sz="2000" b="1"/>
+              <a:defRPr sz="1212" b="1"/>
             </a:lvl2pPr>
-            <a:lvl3pPr marL="914400" indent="0">
+            <a:lvl3pPr marL="554254" indent="0">
               <a:buNone/>
-              <a:defRPr sz="1800" b="1"/>
+              <a:defRPr sz="1091" b="1"/>
             </a:lvl3pPr>
-            <a:lvl4pPr marL="1371600" indent="0">
+            <a:lvl4pPr marL="831381" indent="0">
               <a:buNone/>
-              <a:defRPr sz="1600" b="1"/>
+              <a:defRPr sz="970" b="1"/>
             </a:lvl4pPr>
-            <a:lvl5pPr marL="1828800" indent="0">
+            <a:lvl5pPr marL="1108508" indent="0">
               <a:buNone/>
-              <a:defRPr sz="1600" b="1"/>
+              <a:defRPr sz="970" b="1"/>
             </a:lvl5pPr>
-            <a:lvl6pPr marL="2286000" indent="0">
+            <a:lvl6pPr marL="1385635" indent="0">
               <a:buNone/>
-              <a:defRPr sz="1600" b="1"/>
+              <a:defRPr sz="970" b="1"/>
             </a:lvl6pPr>
-            <a:lvl7pPr marL="2743200" indent="0">
+            <a:lvl7pPr marL="1662762" indent="0">
               <a:buNone/>
-              <a:defRPr sz="1600" b="1"/>
+              <a:defRPr sz="970" b="1"/>
             </a:lvl7pPr>
-            <a:lvl8pPr marL="3200400" indent="0">
+            <a:lvl8pPr marL="1939888" indent="0">
               <a:buNone/>
-              <a:defRPr sz="1600" b="1"/>
+              <a:defRPr sz="970" b="1"/>
             </a:lvl8pPr>
-            <a:lvl9pPr marL="3657600" indent="0">
+            <a:lvl9pPr marL="2217015" indent="0">
               <a:buNone/>
-              <a:defRPr sz="1600" b="1"/>
+              <a:defRPr sz="970" b="1"/>
             </a:lvl9pPr>
           </a:lstStyle>
           <a:p>
@@ -1677,39 +1677,39 @@
         </p:nvSpPr>
         <p:spPr>
           <a:xfrm>
-            <a:off x="4645025" y="2174875"/>
-            <a:ext cx="4041775" cy="3951288"/>
+            <a:off x="2815167" y="1346352"/>
+            <a:ext cx="2449561" cy="2446035"/>
           </a:xfrm>
         </p:spPr>
         <p:txBody>
           <a:bodyPr/>
           <a:lstStyle>
             <a:lvl1pPr>
-              <a:defRPr sz="2400"/>
+              <a:defRPr sz="1455"/>
             </a:lvl1pPr>
             <a:lvl2pPr>
-              <a:defRPr sz="2000"/>
+              <a:defRPr sz="1212"/>
             </a:lvl2pPr>
             <a:lvl3pPr>
-              <a:defRPr sz="1800"/>
+              <a:defRPr sz="1091"/>
             </a:lvl3pPr>
             <a:lvl4pPr>
-              <a:defRPr sz="1600"/>
+              <a:defRPr sz="970"/>
             </a:lvl4pPr>
             <a:lvl5pPr>
-              <a:defRPr sz="1600"/>
+              <a:defRPr sz="970"/>
             </a:lvl5pPr>
             <a:lvl6pPr>
-              <a:defRPr sz="1600"/>
+              <a:defRPr sz="970"/>
             </a:lvl6pPr>
             <a:lvl7pPr>
-              <a:defRPr sz="1600"/>
+              <a:defRPr sz="970"/>
             </a:lvl7pPr>
             <a:lvl8pPr>
-              <a:defRPr sz="1600"/>
+              <a:defRPr sz="970"/>
             </a:lvl8pPr>
             <a:lvl9pPr>
-              <a:defRPr sz="1600"/>
+              <a:defRPr sz="970"/>
             </a:lvl9pPr>
           </a:lstStyle>
           <a:p>
@@ -1767,7 +1767,7 @@
             <a:fld id="{1D8BD707-D9CF-40AE-B4C6-C98DA3205C09}" type="datetimeFigureOut">
               <a:rPr lang="en-US" smtClean="0"/>
               <a:pPr/>
-              <a:t>4/21/2026</a:t>
+              <a:t>4/22/2026</a:t>
             </a:fld>
             <a:endParaRPr lang="en-US"/>
           </a:p>
@@ -1881,7 +1881,7 @@
             <a:fld id="{1D8BD707-D9CF-40AE-B4C6-C98DA3205C09}" type="datetimeFigureOut">
               <a:rPr lang="en-US" smtClean="0"/>
               <a:pPr/>
-              <a:t>4/21/2026</a:t>
+              <a:t>4/22/2026</a:t>
             </a:fld>
             <a:endParaRPr lang="en-US"/>
           </a:p>
@@ -1973,7 +1973,7 @@
             <a:fld id="{1D8BD707-D9CF-40AE-B4C6-C98DA3205C09}" type="datetimeFigureOut">
               <a:rPr lang="en-US" smtClean="0"/>
               <a:pPr/>
-              <a:t>4/21/2026</a:t>
+              <a:t>4/22/2026</a:t>
             </a:fld>
             <a:endParaRPr lang="en-US"/>
           </a:p>
@@ -2059,15 +2059,15 @@
         </p:nvSpPr>
         <p:spPr>
           <a:xfrm>
-            <a:off x="457200" y="273050"/>
-            <a:ext cx="3008313" cy="1162050"/>
+            <a:off x="277091" y="169031"/>
+            <a:ext cx="1823220" cy="719364"/>
           </a:xfrm>
         </p:spPr>
         <p:txBody>
           <a:bodyPr anchor="b"/>
           <a:lstStyle>
             <a:lvl1pPr algn="l">
-              <a:defRPr sz="2000" b="1"/>
+              <a:defRPr sz="1212" b="1"/>
             </a:lvl1pPr>
           </a:lstStyle>
           <a:p>
@@ -2090,39 +2090,39 @@
         </p:nvSpPr>
         <p:spPr>
           <a:xfrm>
-            <a:off x="3575050" y="273050"/>
-            <a:ext cx="5111750" cy="5853113"/>
+            <a:off x="2166697" y="169031"/>
+            <a:ext cx="3098030" cy="3623356"/>
           </a:xfrm>
         </p:spPr>
         <p:txBody>
           <a:bodyPr/>
           <a:lstStyle>
             <a:lvl1pPr>
-              <a:defRPr sz="3200"/>
+              <a:defRPr sz="1940"/>
             </a:lvl1pPr>
             <a:lvl2pPr>
-              <a:defRPr sz="2800"/>
+              <a:defRPr sz="1697"/>
             </a:lvl2pPr>
             <a:lvl3pPr>
-              <a:defRPr sz="2400"/>
+              <a:defRPr sz="1455"/>
             </a:lvl3pPr>
             <a:lvl4pPr>
-              <a:defRPr sz="2000"/>
+              <a:defRPr sz="1212"/>
             </a:lvl4pPr>
             <a:lvl5pPr>
-              <a:defRPr sz="2000"/>
+              <a:defRPr sz="1212"/>
             </a:lvl5pPr>
             <a:lvl6pPr>
-              <a:defRPr sz="2000"/>
+              <a:defRPr sz="1212"/>
             </a:lvl6pPr>
             <a:lvl7pPr>
-              <a:defRPr sz="2000"/>
+              <a:defRPr sz="1212"/>
             </a:lvl7pPr>
             <a:lvl8pPr>
-              <a:defRPr sz="2000"/>
+              <a:defRPr sz="1212"/>
             </a:lvl8pPr>
             <a:lvl9pPr>
-              <a:defRPr sz="2000"/>
+              <a:defRPr sz="1212"/>
             </a:lvl9pPr>
           </a:lstStyle>
           <a:p>
@@ -2174,8 +2174,8 @@
         </p:nvSpPr>
         <p:spPr>
           <a:xfrm>
-            <a:off x="457200" y="1435100"/>
-            <a:ext cx="3008313" cy="4691063"/>
+            <a:off x="277091" y="888396"/>
+            <a:ext cx="1823220" cy="2903991"/>
           </a:xfrm>
         </p:spPr>
         <p:txBody>
@@ -2183,39 +2183,39 @@
           <a:lstStyle>
             <a:lvl1pPr marL="0" indent="0">
               <a:buNone/>
-              <a:defRPr sz="1400"/>
+              <a:defRPr sz="849"/>
             </a:lvl1pPr>
-            <a:lvl2pPr marL="457200" indent="0">
+            <a:lvl2pPr marL="277127" indent="0">
               <a:buNone/>
-              <a:defRPr sz="1200"/>
+              <a:defRPr sz="727"/>
             </a:lvl2pPr>
-            <a:lvl3pPr marL="914400" indent="0">
+            <a:lvl3pPr marL="554254" indent="0">
               <a:buNone/>
-              <a:defRPr sz="1000"/>
+              <a:defRPr sz="606"/>
             </a:lvl3pPr>
-            <a:lvl4pPr marL="1371600" indent="0">
+            <a:lvl4pPr marL="831381" indent="0">
               <a:buNone/>
-              <a:defRPr sz="900"/>
+              <a:defRPr sz="545"/>
             </a:lvl4pPr>
-            <a:lvl5pPr marL="1828800" indent="0">
+            <a:lvl5pPr marL="1108508" indent="0">
               <a:buNone/>
-              <a:defRPr sz="900"/>
+              <a:defRPr sz="545"/>
             </a:lvl5pPr>
-            <a:lvl6pPr marL="2286000" indent="0">
+            <a:lvl6pPr marL="1385635" indent="0">
               <a:buNone/>
-              <a:defRPr sz="900"/>
+              <a:defRPr sz="545"/>
             </a:lvl6pPr>
-            <a:lvl7pPr marL="2743200" indent="0">
+            <a:lvl7pPr marL="1662762" indent="0">
               <a:buNone/>
-              <a:defRPr sz="900"/>
+              <a:defRPr sz="545"/>
             </a:lvl7pPr>
-            <a:lvl8pPr marL="3200400" indent="0">
+            <a:lvl8pPr marL="1939888" indent="0">
               <a:buNone/>
-              <a:defRPr sz="900"/>
+              <a:defRPr sz="545"/>
             </a:lvl8pPr>
-            <a:lvl9pPr marL="3657600" indent="0">
+            <a:lvl9pPr marL="2217015" indent="0">
               <a:buNone/>
-              <a:defRPr sz="900"/>
+              <a:defRPr sz="545"/>
             </a:lvl9pPr>
           </a:lstStyle>
           <a:p>
@@ -2245,7 +2245,7 @@
             <a:fld id="{1D8BD707-D9CF-40AE-B4C6-C98DA3205C09}" type="datetimeFigureOut">
               <a:rPr lang="en-US" smtClean="0"/>
               <a:pPr/>
-              <a:t>4/21/2026</a:t>
+              <a:t>4/22/2026</a:t>
             </a:fld>
             <a:endParaRPr lang="en-US"/>
           </a:p>
@@ -2331,15 +2331,15 @@
         </p:nvSpPr>
         <p:spPr>
           <a:xfrm>
-            <a:off x="1792288" y="4800600"/>
-            <a:ext cx="5486400" cy="566738"/>
+            <a:off x="1086236" y="2971800"/>
+            <a:ext cx="3325091" cy="350838"/>
           </a:xfrm>
         </p:spPr>
         <p:txBody>
           <a:bodyPr anchor="b"/>
           <a:lstStyle>
             <a:lvl1pPr algn="l">
-              <a:defRPr sz="2000" b="1"/>
+              <a:defRPr sz="1212" b="1"/>
             </a:lvl1pPr>
           </a:lstStyle>
           <a:p>
@@ -2362,8 +2362,8 @@
         </p:nvSpPr>
         <p:spPr>
           <a:xfrm>
-            <a:off x="1792288" y="612775"/>
-            <a:ext cx="5486400" cy="4114800"/>
+            <a:off x="1086236" y="379338"/>
+            <a:ext cx="3325091" cy="2547257"/>
           </a:xfrm>
         </p:spPr>
         <p:txBody>
@@ -2371,39 +2371,39 @@
           <a:lstStyle>
             <a:lvl1pPr marL="0" indent="0">
               <a:buNone/>
-              <a:defRPr sz="3200"/>
+              <a:defRPr sz="1940"/>
             </a:lvl1pPr>
-            <a:lvl2pPr marL="457200" indent="0">
+            <a:lvl2pPr marL="277127" indent="0">
               <a:buNone/>
-              <a:defRPr sz="2800"/>
+              <a:defRPr sz="1697"/>
             </a:lvl2pPr>
-            <a:lvl3pPr marL="914400" indent="0">
+            <a:lvl3pPr marL="554254" indent="0">
               <a:buNone/>
-              <a:defRPr sz="2400"/>
+              <a:defRPr sz="1455"/>
             </a:lvl3pPr>
-            <a:lvl4pPr marL="1371600" indent="0">
+            <a:lvl4pPr marL="831381" indent="0">
               <a:buNone/>
-              <a:defRPr sz="2000"/>
+              <a:defRPr sz="1212"/>
             </a:lvl4pPr>
-            <a:lvl5pPr marL="1828800" indent="0">
+            <a:lvl5pPr marL="1108508" indent="0">
               <a:buNone/>
-              <a:defRPr sz="2000"/>
+              <a:defRPr sz="1212"/>
             </a:lvl5pPr>
-            <a:lvl6pPr marL="2286000" indent="0">
+            <a:lvl6pPr marL="1385635" indent="0">
               <a:buNone/>
-              <a:defRPr sz="2000"/>
+              <a:defRPr sz="1212"/>
             </a:lvl6pPr>
-            <a:lvl7pPr marL="2743200" indent="0">
+            <a:lvl7pPr marL="1662762" indent="0">
               <a:buNone/>
-              <a:defRPr sz="2000"/>
+              <a:defRPr sz="1212"/>
             </a:lvl7pPr>
-            <a:lvl8pPr marL="3200400" indent="0">
+            <a:lvl8pPr marL="1939888" indent="0">
               <a:buNone/>
-              <a:defRPr sz="2000"/>
+              <a:defRPr sz="1212"/>
             </a:lvl8pPr>
-            <a:lvl9pPr marL="3657600" indent="0">
+            <a:lvl9pPr marL="2217015" indent="0">
               <a:buNone/>
-              <a:defRPr sz="2000"/>
+              <a:defRPr sz="1212"/>
             </a:lvl9pPr>
           </a:lstStyle>
           <a:p>
@@ -2423,8 +2423,8 @@
         </p:nvSpPr>
         <p:spPr>
           <a:xfrm>
-            <a:off x="1792288" y="5367338"/>
-            <a:ext cx="5486400" cy="804862"/>
+            <a:off x="1086236" y="3322638"/>
+            <a:ext cx="3325091" cy="498248"/>
           </a:xfrm>
         </p:spPr>
         <p:txBody>
@@ -2432,39 +2432,39 @@
           <a:lstStyle>
             <a:lvl1pPr marL="0" indent="0">
               <a:buNone/>
-              <a:defRPr sz="1400"/>
+              <a:defRPr sz="849"/>
             </a:lvl1pPr>
-            <a:lvl2pPr marL="457200" indent="0">
+            <a:lvl2pPr marL="277127" indent="0">
               <a:buNone/>
-              <a:defRPr sz="1200"/>
+              <a:defRPr sz="727"/>
             </a:lvl2pPr>
-            <a:lvl3pPr marL="914400" indent="0">
+            <a:lvl3pPr marL="554254" indent="0">
               <a:buNone/>
-              <a:defRPr sz="1000"/>
+              <a:defRPr sz="606"/>
             </a:lvl3pPr>
-            <a:lvl4pPr marL="1371600" indent="0">
+            <a:lvl4pPr marL="831381" indent="0">
               <a:buNone/>
-              <a:defRPr sz="900"/>
+              <a:defRPr sz="545"/>
             </a:lvl4pPr>
-            <a:lvl5pPr marL="1828800" indent="0">
+            <a:lvl5pPr marL="1108508" indent="0">
               <a:buNone/>
-              <a:defRPr sz="900"/>
+              <a:defRPr sz="545"/>
             </a:lvl5pPr>
-            <a:lvl6pPr marL="2286000" indent="0">
+            <a:lvl6pPr marL="1385635" indent="0">
               <a:buNone/>
-              <a:defRPr sz="900"/>
+              <a:defRPr sz="545"/>
             </a:lvl6pPr>
-            <a:lvl7pPr marL="2743200" indent="0">
+            <a:lvl7pPr marL="1662762" indent="0">
               <a:buNone/>
-              <a:defRPr sz="900"/>
+              <a:defRPr sz="545"/>
             </a:lvl7pPr>
-            <a:lvl8pPr marL="3200400" indent="0">
+            <a:lvl8pPr marL="1939888" indent="0">
               <a:buNone/>
-              <a:defRPr sz="900"/>
+              <a:defRPr sz="545"/>
             </a:lvl8pPr>
-            <a:lvl9pPr marL="3657600" indent="0">
+            <a:lvl9pPr marL="2217015" indent="0">
               <a:buNone/>
-              <a:defRPr sz="900"/>
+              <a:defRPr sz="545"/>
             </a:lvl9pPr>
           </a:lstStyle>
           <a:p>
@@ -2494,7 +2494,7 @@
             <a:fld id="{1D8BD707-D9CF-40AE-B4C6-C98DA3205C09}" type="datetimeFigureOut">
               <a:rPr lang="en-US" smtClean="0"/>
               <a:pPr/>
-              <a:t>4/21/2026</a:t>
+              <a:t>4/22/2026</a:t>
             </a:fld>
             <a:endParaRPr lang="en-US"/>
           </a:p>
@@ -2585,8 +2585,8 @@
         </p:nvSpPr>
         <p:spPr>
           <a:xfrm>
-            <a:off x="457200" y="274638"/>
-            <a:ext cx="8229600" cy="1143000"/>
+            <a:off x="277091" y="170015"/>
+            <a:ext cx="4987636" cy="707571"/>
           </a:xfrm>
           <a:prstGeom prst="rect">
             <a:avLst/>
@@ -2617,8 +2617,8 @@
         </p:nvSpPr>
         <p:spPr>
           <a:xfrm>
-            <a:off x="457200" y="1600200"/>
-            <a:ext cx="8229600" cy="4525963"/>
+            <a:off x="277091" y="990601"/>
+            <a:ext cx="4987636" cy="2801787"/>
           </a:xfrm>
           <a:prstGeom prst="rect">
             <a:avLst/>
@@ -2678,8 +2678,8 @@
         </p:nvSpPr>
         <p:spPr>
           <a:xfrm>
-            <a:off x="457200" y="6356350"/>
-            <a:ext cx="2133600" cy="365125"/>
+            <a:off x="277091" y="3934884"/>
+            <a:ext cx="1293091" cy="226030"/>
           </a:xfrm>
           <a:prstGeom prst="rect">
             <a:avLst/>
@@ -2689,7 +2689,7 @@
           <a:bodyPr vert="horz" lIns="91440" tIns="45720" rIns="91440" bIns="45720" rtlCol="0" anchor="ctr"/>
           <a:lstStyle>
             <a:lvl1pPr algn="l">
-              <a:defRPr sz="1200">
+              <a:defRPr sz="727">
                 <a:solidFill>
                   <a:schemeClr val="tx1">
                     <a:tint val="75000"/>
@@ -2702,7 +2702,7 @@
             <a:fld id="{1D8BD707-D9CF-40AE-B4C6-C98DA3205C09}" type="datetimeFigureOut">
               <a:rPr lang="en-US" smtClean="0"/>
               <a:pPr/>
-              <a:t>4/21/2026</a:t>
+              <a:t>4/22/2026</a:t>
             </a:fld>
             <a:endParaRPr lang="en-US"/>
           </a:p>
@@ -2720,8 +2720,8 @@
         </p:nvSpPr>
         <p:spPr>
           <a:xfrm>
-            <a:off x="3124200" y="6356350"/>
-            <a:ext cx="2895600" cy="365125"/>
+            <a:off x="1893456" y="3934884"/>
+            <a:ext cx="1754909" cy="226030"/>
           </a:xfrm>
           <a:prstGeom prst="rect">
             <a:avLst/>
@@ -2731,7 +2731,7 @@
           <a:bodyPr vert="horz" lIns="91440" tIns="45720" rIns="91440" bIns="45720" rtlCol="0" anchor="ctr"/>
           <a:lstStyle>
             <a:lvl1pPr algn="ctr">
-              <a:defRPr sz="1200">
+              <a:defRPr sz="727">
                 <a:solidFill>
                   <a:schemeClr val="tx1">
                     <a:tint val="75000"/>
@@ -2757,8 +2757,8 @@
         </p:nvSpPr>
         <p:spPr>
           <a:xfrm>
-            <a:off x="6553200" y="6356350"/>
-            <a:ext cx="2133600" cy="365125"/>
+            <a:off x="3971636" y="3934884"/>
+            <a:ext cx="1293091" cy="226030"/>
           </a:xfrm>
           <a:prstGeom prst="rect">
             <a:avLst/>
@@ -2768,7 +2768,7 @@
           <a:bodyPr vert="horz" lIns="91440" tIns="45720" rIns="91440" bIns="45720" rtlCol="0" anchor="ctr"/>
           <a:lstStyle>
             <a:lvl1pPr algn="r">
-              <a:defRPr sz="1200">
+              <a:defRPr sz="727">
                 <a:solidFill>
                   <a:schemeClr val="tx1">
                     <a:tint val="75000"/>
@@ -2805,12 +2805,12 @@
   </p:sldLayoutIdLst>
   <p:txStyles>
     <p:titleStyle>
-      <a:lvl1pPr algn="ctr" defTabSz="914400" rtl="0" eaLnBrk="1" latinLnBrk="0" hangingPunct="1">
+      <a:lvl1pPr algn="ctr" defTabSz="554254" rtl="0" eaLnBrk="1" latinLnBrk="0" hangingPunct="1">
         <a:spcBef>
           <a:spcPct val="0"/>
         </a:spcBef>
         <a:buNone/>
-        <a:defRPr sz="4400" kern="1200">
+        <a:defRPr sz="2667" kern="1200">
           <a:solidFill>
             <a:schemeClr val="tx1"/>
           </a:solidFill>
@@ -2821,13 +2821,13 @@
       </a:lvl1pPr>
     </p:titleStyle>
     <p:bodyStyle>
-      <a:lvl1pPr marL="342900" indent="-342900" algn="l" defTabSz="914400" rtl="0" eaLnBrk="1" latinLnBrk="0" hangingPunct="1">
+      <a:lvl1pPr marL="207846" indent="-207846" algn="l" defTabSz="554254" rtl="0" eaLnBrk="1" latinLnBrk="0" hangingPunct="1">
         <a:spcBef>
           <a:spcPct val="20000"/>
         </a:spcBef>
         <a:buFont typeface="Arial" pitchFamily="34" charset="0"/>
         <a:buChar char="•"/>
-        <a:defRPr sz="3200" kern="1200">
+        <a:defRPr sz="1940" kern="1200">
           <a:solidFill>
             <a:schemeClr val="tx1"/>
           </a:solidFill>
@@ -2836,13 +2836,13 @@
           <a:cs typeface="+mn-cs"/>
         </a:defRPr>
       </a:lvl1pPr>
-      <a:lvl2pPr marL="742950" indent="-285750" algn="l" defTabSz="914400" rtl="0" eaLnBrk="1" latinLnBrk="0" hangingPunct="1">
+      <a:lvl2pPr marL="450331" indent="-173204" algn="l" defTabSz="554254" rtl="0" eaLnBrk="1" latinLnBrk="0" hangingPunct="1">
         <a:spcBef>
           <a:spcPct val="20000"/>
         </a:spcBef>
         <a:buFont typeface="Arial" pitchFamily="34" charset="0"/>
         <a:buChar char="–"/>
-        <a:defRPr sz="2800" kern="1200">
+        <a:defRPr sz="1697" kern="1200">
           <a:solidFill>
             <a:schemeClr val="tx1"/>
           </a:solidFill>
@@ -2851,13 +2851,13 @@
           <a:cs typeface="+mn-cs"/>
         </a:defRPr>
       </a:lvl2pPr>
-      <a:lvl3pPr marL="1143000" indent="-228600" algn="l" defTabSz="914400" rtl="0" eaLnBrk="1" latinLnBrk="0" hangingPunct="1">
+      <a:lvl3pPr marL="692817" indent="-138563" algn="l" defTabSz="554254" rtl="0" eaLnBrk="1" latinLnBrk="0" hangingPunct="1">
         <a:spcBef>
           <a:spcPct val="20000"/>
         </a:spcBef>
         <a:buFont typeface="Arial" pitchFamily="34" charset="0"/>
         <a:buChar char="•"/>
-        <a:defRPr sz="2400" kern="1200">
+        <a:defRPr sz="1455" kern="1200">
           <a:solidFill>
             <a:schemeClr val="tx1"/>
           </a:solidFill>
@@ -2866,13 +2866,13 @@
           <a:cs typeface="+mn-cs"/>
         </a:defRPr>
       </a:lvl3pPr>
-      <a:lvl4pPr marL="1600200" indent="-228600" algn="l" defTabSz="914400" rtl="0" eaLnBrk="1" latinLnBrk="0" hangingPunct="1">
+      <a:lvl4pPr marL="969944" indent="-138563" algn="l" defTabSz="554254" rtl="0" eaLnBrk="1" latinLnBrk="0" hangingPunct="1">
         <a:spcBef>
           <a:spcPct val="20000"/>
         </a:spcBef>
         <a:buFont typeface="Arial" pitchFamily="34" charset="0"/>
         <a:buChar char="–"/>
-        <a:defRPr sz="2000" kern="1200">
+        <a:defRPr sz="1212" kern="1200">
           <a:solidFill>
             <a:schemeClr val="tx1"/>
           </a:solidFill>
@@ -2881,13 +2881,13 @@
           <a:cs typeface="+mn-cs"/>
         </a:defRPr>
       </a:lvl4pPr>
-      <a:lvl5pPr marL="2057400" indent="-228600" algn="l" defTabSz="914400" rtl="0" eaLnBrk="1" latinLnBrk="0" hangingPunct="1">
+      <a:lvl5pPr marL="1247071" indent="-138563" algn="l" defTabSz="554254" rtl="0" eaLnBrk="1" latinLnBrk="0" hangingPunct="1">
         <a:spcBef>
           <a:spcPct val="20000"/>
         </a:spcBef>
         <a:buFont typeface="Arial" pitchFamily="34" charset="0"/>
         <a:buChar char="»"/>
-        <a:defRPr sz="2000" kern="1200">
+        <a:defRPr sz="1212" kern="1200">
           <a:solidFill>
             <a:schemeClr val="tx1"/>
           </a:solidFill>
@@ -2896,13 +2896,13 @@
           <a:cs typeface="+mn-cs"/>
         </a:defRPr>
       </a:lvl5pPr>
-      <a:lvl6pPr marL="2514600" indent="-228600" algn="l" defTabSz="914400" rtl="0" eaLnBrk="1" latinLnBrk="0" hangingPunct="1">
+      <a:lvl6pPr marL="1524198" indent="-138563" algn="l" defTabSz="554254" rtl="0" eaLnBrk="1" latinLnBrk="0" hangingPunct="1">
         <a:spcBef>
           <a:spcPct val="20000"/>
         </a:spcBef>
         <a:buFont typeface="Arial" pitchFamily="34" charset="0"/>
         <a:buChar char="•"/>
-        <a:defRPr sz="2000" kern="1200">
+        <a:defRPr sz="1212" kern="1200">
           <a:solidFill>
             <a:schemeClr val="tx1"/>
           </a:solidFill>
@@ -2911,13 +2911,13 @@
           <a:cs typeface="+mn-cs"/>
         </a:defRPr>
       </a:lvl6pPr>
-      <a:lvl7pPr marL="2971800" indent="-228600" algn="l" defTabSz="914400" rtl="0" eaLnBrk="1" latinLnBrk="0" hangingPunct="1">
+      <a:lvl7pPr marL="1801325" indent="-138563" algn="l" defTabSz="554254" rtl="0" eaLnBrk="1" latinLnBrk="0" hangingPunct="1">
         <a:spcBef>
           <a:spcPct val="20000"/>
         </a:spcBef>
         <a:buFont typeface="Arial" pitchFamily="34" charset="0"/>
         <a:buChar char="•"/>
-        <a:defRPr sz="2000" kern="1200">
+        <a:defRPr sz="1212" kern="1200">
           <a:solidFill>
             <a:schemeClr val="tx1"/>
           </a:solidFill>
@@ -2926,13 +2926,13 @@
           <a:cs typeface="+mn-cs"/>
         </a:defRPr>
       </a:lvl7pPr>
-      <a:lvl8pPr marL="3429000" indent="-228600" algn="l" defTabSz="914400" rtl="0" eaLnBrk="1" latinLnBrk="0" hangingPunct="1">
+      <a:lvl8pPr marL="2078452" indent="-138563" algn="l" defTabSz="554254" rtl="0" eaLnBrk="1" latinLnBrk="0" hangingPunct="1">
         <a:spcBef>
           <a:spcPct val="20000"/>
         </a:spcBef>
         <a:buFont typeface="Arial" pitchFamily="34" charset="0"/>
         <a:buChar char="•"/>
-        <a:defRPr sz="2000" kern="1200">
+        <a:defRPr sz="1212" kern="1200">
           <a:solidFill>
             <a:schemeClr val="tx1"/>
           </a:solidFill>
@@ -2941,13 +2941,13 @@
           <a:cs typeface="+mn-cs"/>
         </a:defRPr>
       </a:lvl8pPr>
-      <a:lvl9pPr marL="3886200" indent="-228600" algn="l" defTabSz="914400" rtl="0" eaLnBrk="1" latinLnBrk="0" hangingPunct="1">
+      <a:lvl9pPr marL="2355579" indent="-138563" algn="l" defTabSz="554254" rtl="0" eaLnBrk="1" latinLnBrk="0" hangingPunct="1">
         <a:spcBef>
           <a:spcPct val="20000"/>
         </a:spcBef>
         <a:buFont typeface="Arial" pitchFamily="34" charset="0"/>
         <a:buChar char="•"/>
-        <a:defRPr sz="2000" kern="1200">
+        <a:defRPr sz="1212" kern="1200">
           <a:solidFill>
             <a:schemeClr val="tx1"/>
           </a:solidFill>
@@ -2961,8 +2961,8 @@
       <a:defPPr>
         <a:defRPr lang="en-US"/>
       </a:defPPr>
-      <a:lvl1pPr marL="0" algn="l" defTabSz="914400" rtl="0" eaLnBrk="1" latinLnBrk="0" hangingPunct="1">
-        <a:defRPr sz="1800" kern="1200">
+      <a:lvl1pPr marL="0" algn="l" defTabSz="554254" rtl="0" eaLnBrk="1" latinLnBrk="0" hangingPunct="1">
+        <a:defRPr sz="1091" kern="1200">
           <a:solidFill>
             <a:schemeClr val="tx1"/>
           </a:solidFill>
@@ -2971,8 +2971,8 @@
           <a:cs typeface="+mn-cs"/>
         </a:defRPr>
       </a:lvl1pPr>
-      <a:lvl2pPr marL="457200" algn="l" defTabSz="914400" rtl="0" eaLnBrk="1" latinLnBrk="0" hangingPunct="1">
-        <a:defRPr sz="1800" kern="1200">
+      <a:lvl2pPr marL="277127" algn="l" defTabSz="554254" rtl="0" eaLnBrk="1" latinLnBrk="0" hangingPunct="1">
+        <a:defRPr sz="1091" kern="1200">
           <a:solidFill>
             <a:schemeClr val="tx1"/>
           </a:solidFill>
@@ -2981,8 +2981,8 @@
           <a:cs typeface="+mn-cs"/>
         </a:defRPr>
       </a:lvl2pPr>
-      <a:lvl3pPr marL="914400" algn="l" defTabSz="914400" rtl="0" eaLnBrk="1" latinLnBrk="0" hangingPunct="1">
-        <a:defRPr sz="1800" kern="1200">
+      <a:lvl3pPr marL="554254" algn="l" defTabSz="554254" rtl="0" eaLnBrk="1" latinLnBrk="0" hangingPunct="1">
+        <a:defRPr sz="1091" kern="1200">
           <a:solidFill>
             <a:schemeClr val="tx1"/>
           </a:solidFill>
@@ -2991,8 +2991,8 @@
           <a:cs typeface="+mn-cs"/>
         </a:defRPr>
       </a:lvl3pPr>
-      <a:lvl4pPr marL="1371600" algn="l" defTabSz="914400" rtl="0" eaLnBrk="1" latinLnBrk="0" hangingPunct="1">
-        <a:defRPr sz="1800" kern="1200">
+      <a:lvl4pPr marL="831381" algn="l" defTabSz="554254" rtl="0" eaLnBrk="1" latinLnBrk="0" hangingPunct="1">
+        <a:defRPr sz="1091" kern="1200">
           <a:solidFill>
             <a:schemeClr val="tx1"/>
           </a:solidFill>
@@ -3001,8 +3001,8 @@
           <a:cs typeface="+mn-cs"/>
         </a:defRPr>
       </a:lvl4pPr>
-      <a:lvl5pPr marL="1828800" algn="l" defTabSz="914400" rtl="0" eaLnBrk="1" latinLnBrk="0" hangingPunct="1">
-        <a:defRPr sz="1800" kern="1200">
+      <a:lvl5pPr marL="1108508" algn="l" defTabSz="554254" rtl="0" eaLnBrk="1" latinLnBrk="0" hangingPunct="1">
+        <a:defRPr sz="1091" kern="1200">
           <a:solidFill>
             <a:schemeClr val="tx1"/>
           </a:solidFill>
@@ -3011,8 +3011,8 @@
           <a:cs typeface="+mn-cs"/>
         </a:defRPr>
       </a:lvl5pPr>
-      <a:lvl6pPr marL="2286000" algn="l" defTabSz="914400" rtl="0" eaLnBrk="1" latinLnBrk="0" hangingPunct="1">
-        <a:defRPr sz="1800" kern="1200">
+      <a:lvl6pPr marL="1385635" algn="l" defTabSz="554254" rtl="0" eaLnBrk="1" latinLnBrk="0" hangingPunct="1">
+        <a:defRPr sz="1091" kern="1200">
           <a:solidFill>
             <a:schemeClr val="tx1"/>
           </a:solidFill>
@@ -3021,8 +3021,8 @@
           <a:cs typeface="+mn-cs"/>
         </a:defRPr>
       </a:lvl6pPr>
-      <a:lvl7pPr marL="2743200" algn="l" defTabSz="914400" rtl="0" eaLnBrk="1" latinLnBrk="0" hangingPunct="1">
-        <a:defRPr sz="1800" kern="1200">
+      <a:lvl7pPr marL="1662762" algn="l" defTabSz="554254" rtl="0" eaLnBrk="1" latinLnBrk="0" hangingPunct="1">
+        <a:defRPr sz="1091" kern="1200">
           <a:solidFill>
             <a:schemeClr val="tx1"/>
           </a:solidFill>
@@ -3031,8 +3031,8 @@
           <a:cs typeface="+mn-cs"/>
         </a:defRPr>
       </a:lvl7pPr>
-      <a:lvl8pPr marL="3200400" algn="l" defTabSz="914400" rtl="0" eaLnBrk="1" latinLnBrk="0" hangingPunct="1">
-        <a:defRPr sz="1800" kern="1200">
+      <a:lvl8pPr marL="1939888" algn="l" defTabSz="554254" rtl="0" eaLnBrk="1" latinLnBrk="0" hangingPunct="1">
+        <a:defRPr sz="1091" kern="1200">
           <a:solidFill>
             <a:schemeClr val="tx1"/>
           </a:solidFill>
@@ -3041,8 +3041,8 @@
           <a:cs typeface="+mn-cs"/>
         </a:defRPr>
       </a:lvl8pPr>
-      <a:lvl9pPr marL="3657600" algn="l" defTabSz="914400" rtl="0" eaLnBrk="1" latinLnBrk="0" hangingPunct="1">
-        <a:defRPr sz="1800" kern="1200">
+      <a:lvl9pPr marL="2217015" algn="l" defTabSz="554254" rtl="0" eaLnBrk="1" latinLnBrk="0" hangingPunct="1">
+        <a:defRPr sz="1091" kern="1200">
           <a:solidFill>
             <a:schemeClr val="tx1"/>
           </a:solidFill>
@@ -3101,8 +3101,8 @@
         </p:blipFill>
         <p:spPr>
           <a:xfrm>
-            <a:off x="0" y="15036800"/>
-            <a:ext cx="11315700" cy="977900"/>
+            <a:off x="0" y="9313333"/>
+            <a:ext cx="6858000" cy="592667"/>
           </a:xfrm>
           <a:prstGeom prst="rect">
             <a:avLst/>
@@ -3131,8 +3131,8 @@
         </p:blipFill>
         <p:spPr>
           <a:xfrm>
-            <a:off x="0" y="-25400"/>
-            <a:ext cx="11315700" cy="2082800"/>
+            <a:off x="0" y="0"/>
+            <a:ext cx="6858000" cy="1262303"/>
           </a:xfrm>
           <a:prstGeom prst="rect">
             <a:avLst/>
@@ -3161,8 +3161,8 @@
         </p:blipFill>
         <p:spPr>
           <a:xfrm rot="10800000">
-            <a:off x="7023100" y="0"/>
-            <a:ext cx="4292600" cy="2063604"/>
+            <a:off x="4256424" y="15394"/>
+            <a:ext cx="2601576" cy="1250669"/>
           </a:xfrm>
           <a:prstGeom prst="rect">
             <a:avLst/>
@@ -3191,8 +3191,8 @@
         </p:blipFill>
         <p:spPr>
           <a:xfrm rot="10800000">
-            <a:off x="0" y="-12700"/>
-            <a:ext cx="3962400" cy="2063604"/>
+            <a:off x="0" y="7696"/>
+            <a:ext cx="2401455" cy="1250669"/>
           </a:xfrm>
           <a:prstGeom prst="rect">
             <a:avLst/>
@@ -3213,15 +3213,15 @@
         </p:nvSpPr>
         <p:spPr>
           <a:xfrm>
-            <a:off x="3022600" y="15379700"/>
-            <a:ext cx="5283200" cy="330200"/>
+            <a:off x="1831880" y="9521152"/>
+            <a:ext cx="3201939" cy="200121"/>
           </a:xfrm>
           <a:prstGeom prst="rect">
             <a:avLst/>
           </a:prstGeom>
         </p:spPr>
         <p:txBody>
-          <a:bodyPr lIns="0" tIns="23707" rIns="0" bIns="0" rtlCol="0" anchor="t"/>
+          <a:bodyPr lIns="0" tIns="14368" rIns="0" bIns="0" rtlCol="0" anchor="t"/>
           <a:lstStyle/>
           <a:p>
             <a:pPr lvl="0" algn="ctr">
@@ -3230,7 +3230,7 @@
               </a:lnSpc>
             </a:pPr>
             <a:r>
-              <a:rPr lang="en-US" sz="1866" b="1" dirty="0">
+              <a:rPr lang="en-US" sz="1131" b="1" dirty="0">
                 <a:solidFill>
                   <a:srgbClr val="FAFAFA"/>
                 </a:solidFill>
@@ -3240,14 +3240,6 @@
               </a:rPr>
               <a:t>LG ELECTRONICS</a:t>
             </a:r>
-            <a:endParaRPr lang="en-US" sz="1866" b="1" i="0" u="none" strike="noStrike" dirty="0">
-              <a:solidFill>
-                <a:srgbClr val="FAFAFA"/>
-              </a:solidFill>
-              <a:latin typeface="LG스마트체2.0 Bold" panose="020B0600000101010101" pitchFamily="50" charset="-127"/>
-              <a:ea typeface="LG스마트체2.0 Bold" panose="020B0600000101010101" pitchFamily="50" charset="-127"/>
-              <a:cs typeface="Montserrat Bold"/>
-            </a:endParaRPr>
           </a:p>
         </p:txBody>
       </p:sp>
@@ -3265,15 +3257,15 @@
         </p:nvSpPr>
         <p:spPr>
           <a:xfrm>
-            <a:off x="736600" y="533400"/>
-            <a:ext cx="9829800" cy="1384300"/>
+            <a:off x="446425" y="338666"/>
+            <a:ext cx="5957455" cy="838970"/>
           </a:xfrm>
           <a:prstGeom prst="rect">
             <a:avLst/>
           </a:prstGeom>
         </p:spPr>
         <p:txBody>
-          <a:bodyPr lIns="0" tIns="115146" rIns="0" bIns="0" rtlCol="0" anchor="t"/>
+          <a:bodyPr lIns="0" tIns="69785" rIns="0" bIns="0" rtlCol="0" anchor="t"/>
           <a:lstStyle/>
           <a:p>
             <a:pPr lvl="0" algn="ctr">
@@ -3282,7 +3274,7 @@
               </a:lnSpc>
             </a:pPr>
             <a:r>
-              <a:rPr lang="ko-KR" altLang="en-US" sz="4533" b="0" i="0" u="none" strike="noStrike" dirty="0">
+              <a:rPr lang="ko-KR" altLang="en-US" sz="2747" dirty="0">
                 <a:solidFill>
                   <a:srgbClr val="FAFAFA"/>
                 </a:solidFill>
@@ -3292,7 +3284,7 @@
               </a:rPr>
               <a:t>캐치마인드</a:t>
             </a:r>
-            <a:endParaRPr lang="en-US" sz="4533" b="0" i="0" u="none" strike="noStrike" dirty="0">
+            <a:endParaRPr lang="en-US" sz="2747" dirty="0">
               <a:solidFill>
                 <a:srgbClr val="FAFAFA"/>
               </a:solidFill>
@@ -3317,15 +3309,15 @@
         </p:nvSpPr>
         <p:spPr>
           <a:xfrm>
-            <a:off x="330200" y="1430020"/>
-            <a:ext cx="10680700" cy="474980"/>
+            <a:off x="200122" y="882073"/>
+            <a:ext cx="6473152" cy="287867"/>
           </a:xfrm>
           <a:prstGeom prst="rect">
             <a:avLst/>
           </a:prstGeom>
         </p:spPr>
         <p:txBody>
-          <a:bodyPr lIns="0" tIns="30480" rIns="0" bIns="0" rtlCol="0" anchor="t"/>
+          <a:bodyPr lIns="0" tIns="18473" rIns="0" bIns="0" rtlCol="0" anchor="t"/>
           <a:lstStyle/>
           <a:p>
             <a:pPr lvl="0" algn="r">
@@ -3334,7 +3326,7 @@
               </a:lnSpc>
             </a:pPr>
             <a:r>
-              <a:rPr lang="ko-KR" altLang="en-US" sz="2400" dirty="0" err="1">
+              <a:rPr lang="ko-KR" altLang="en-US" sz="1455" dirty="0" err="1">
                 <a:solidFill>
                   <a:srgbClr val="FAFAFA"/>
                 </a:solidFill>
@@ -3345,7 +3337,7 @@
               <a:t>쿵야</a:t>
             </a:r>
             <a:r>
-              <a:rPr lang="ko-KR" altLang="en-US" sz="2400" dirty="0">
+              <a:rPr lang="ko-KR" altLang="en-US" sz="1455" dirty="0">
                 <a:solidFill>
                   <a:srgbClr val="FAFAFA"/>
                 </a:solidFill>
@@ -3356,7 +3348,7 @@
               <a:t> 팀</a:t>
             </a:r>
             <a:r>
-              <a:rPr lang="en-US" altLang="ko-KR" sz="2400" dirty="0">
+              <a:rPr lang="en-US" altLang="ko-KR" sz="1455" dirty="0">
                 <a:solidFill>
                   <a:srgbClr val="FAFAFA"/>
                 </a:solidFill>
@@ -3367,7 +3359,7 @@
               <a:t>(</a:t>
             </a:r>
             <a:r>
-              <a:rPr lang="ko-KR" altLang="en-US" sz="2400" b="0" i="0" u="none" strike="noStrike" dirty="0" err="1">
+              <a:rPr lang="ko-KR" altLang="en-US" sz="1455" dirty="0" err="1">
                 <a:solidFill>
                   <a:srgbClr val="FAFAFA"/>
                 </a:solidFill>
@@ -3378,7 +3370,7 @@
               <a:t>엄제원</a:t>
             </a:r>
             <a:r>
-              <a:rPr lang="en-US" altLang="ko-KR" sz="2400" b="0" i="0" u="none" strike="noStrike" dirty="0">
+              <a:rPr lang="en-US" altLang="ko-KR" sz="1455" dirty="0">
                 <a:solidFill>
                   <a:srgbClr val="FAFAFA"/>
                 </a:solidFill>
@@ -3389,7 +3381,7 @@
               <a:t>, </a:t>
             </a:r>
             <a:r>
-              <a:rPr lang="ko-KR" altLang="en-US" sz="2400" b="0" i="0" u="none" strike="noStrike" dirty="0">
+              <a:rPr lang="ko-KR" altLang="en-US" sz="1455" dirty="0">
                 <a:solidFill>
                   <a:srgbClr val="FAFAFA"/>
                 </a:solidFill>
@@ -3400,7 +3392,7 @@
               <a:t>이경환</a:t>
             </a:r>
             <a:r>
-              <a:rPr lang="en-US" altLang="ko-KR" sz="2400" b="0" i="0" u="none" strike="noStrike" dirty="0">
+              <a:rPr lang="en-US" altLang="ko-KR" sz="1455" dirty="0">
                 <a:solidFill>
                   <a:srgbClr val="FAFAFA"/>
                 </a:solidFill>
@@ -3411,7 +3403,7 @@
               <a:t>, </a:t>
             </a:r>
             <a:r>
-              <a:rPr lang="ko-KR" altLang="en-US" sz="2400" b="0" i="0" u="none" strike="noStrike" dirty="0">
+              <a:rPr lang="ko-KR" altLang="en-US" sz="1455" dirty="0">
                 <a:solidFill>
                   <a:srgbClr val="FAFAFA"/>
                 </a:solidFill>
@@ -3422,7 +3414,7 @@
               <a:t>윤지원</a:t>
             </a:r>
             <a:r>
-              <a:rPr lang="en-US" altLang="ko-KR" sz="2400" b="0" i="0" u="none" strike="noStrike" dirty="0">
+              <a:rPr lang="en-US" altLang="ko-KR" sz="1455" dirty="0">
                 <a:solidFill>
                   <a:srgbClr val="FAFAFA"/>
                 </a:solidFill>
@@ -3432,7 +3424,7 @@
               </a:rPr>
               <a:t>)</a:t>
             </a:r>
-            <a:endParaRPr lang="en-US" sz="2400" b="0" i="0" u="none" strike="noStrike" dirty="0">
+            <a:endParaRPr lang="en-US" sz="1455" dirty="0">
               <a:solidFill>
                 <a:srgbClr val="FAFAFA"/>
               </a:solidFill>
@@ -3457,8 +3449,8 @@
         </p:nvGrpSpPr>
         <p:grpSpPr>
           <a:xfrm>
-            <a:off x="330200" y="5150474"/>
-            <a:ext cx="10655300" cy="1003300"/>
+            <a:off x="200122" y="3225409"/>
+            <a:ext cx="6457758" cy="608061"/>
             <a:chOff x="330200" y="7461250"/>
             <a:chExt cx="10655300" cy="1003300"/>
           </a:xfrm>
@@ -3545,7 +3537,7 @@
             </a:prstGeom>
           </p:spPr>
           <p:txBody>
-            <a:bodyPr lIns="0" tIns="40640" rIns="0" bIns="0" rtlCol="0" anchor="t"/>
+            <a:bodyPr lIns="0" tIns="24630" rIns="0" bIns="0" rtlCol="0" anchor="t"/>
             <a:lstStyle/>
             <a:p>
               <a:pPr lvl="0">
@@ -3554,7 +3546,7 @@
                 </a:lnSpc>
               </a:pPr>
               <a:r>
-                <a:rPr lang="ko-KR" altLang="en-US" sz="3200" b="0" i="0" u="none" strike="noStrike" dirty="0">
+                <a:rPr lang="ko-KR" altLang="en-US" sz="1940" dirty="0">
                   <a:solidFill>
                     <a:srgbClr val="FAFAFA"/>
                   </a:solidFill>
@@ -3564,7 +3556,7 @@
                 </a:rPr>
                 <a:t>게임 방식</a:t>
               </a:r>
-              <a:endParaRPr lang="en-US" sz="3200" b="0" i="0" u="none" strike="noStrike" dirty="0">
+              <a:endParaRPr lang="en-US" sz="1940" dirty="0">
                 <a:solidFill>
                   <a:srgbClr val="FAFAFA"/>
                 </a:solidFill>
@@ -3597,7 +3589,7 @@
             </a:prstGeom>
           </p:spPr>
           <p:txBody>
-            <a:bodyPr lIns="0" tIns="40640" rIns="0" bIns="0" rtlCol="0" anchor="t"/>
+            <a:bodyPr lIns="0" tIns="24630" rIns="0" bIns="0" rtlCol="0" anchor="t"/>
             <a:lstStyle/>
             <a:p>
               <a:pPr lvl="0" algn="ctr">
@@ -3606,7 +3598,7 @@
                 </a:lnSpc>
               </a:pPr>
               <a:r>
-                <a:rPr lang="en-US" altLang="ko-KR" sz="3200" b="0" i="0" u="none" strike="noStrike" dirty="0">
+                <a:rPr lang="en-US" altLang="ko-KR" sz="1940" dirty="0">
                   <a:solidFill>
                     <a:srgbClr val="FAFAFA"/>
                   </a:solidFill>
@@ -3616,7 +3608,7 @@
                 </a:rPr>
                 <a:t>02</a:t>
               </a:r>
-              <a:endParaRPr lang="en-US" sz="3200" b="0" i="0" u="none" strike="noStrike" dirty="0">
+              <a:endParaRPr lang="en-US" sz="1940" dirty="0">
                 <a:solidFill>
                   <a:srgbClr val="FAFAFA"/>
                 </a:solidFill>
@@ -3643,7 +3635,7 @@
           <p:nvPr/>
         </p:nvPicPr>
         <p:blipFill>
-          <a:blip r:embed="rId8">
+          <a:blip r:embed="rId8" cstate="print">
             <a:extLst>
               <a:ext uri="{28A0092B-C50C-407E-A947-70E740481C1C}">
                 <a14:useLocalDpi xmlns:a14="http://schemas.microsoft.com/office/drawing/2010/main" val="0"/>
@@ -3656,8 +3648,8 @@
         </p:blipFill>
         <p:spPr>
           <a:xfrm>
-            <a:off x="6252751" y="7030896"/>
-            <a:ext cx="4320000" cy="2511237"/>
+            <a:off x="3789546" y="4365058"/>
+            <a:ext cx="2618182" cy="1521962"/>
           </a:xfrm>
           <a:prstGeom prst="rect">
             <a:avLst/>
@@ -3679,7 +3671,7 @@
           <p:nvPr/>
         </p:nvPicPr>
         <p:blipFill>
-          <a:blip r:embed="rId9">
+          <a:blip r:embed="rId9" cstate="print">
             <a:extLst>
               <a:ext uri="{28A0092B-C50C-407E-A947-70E740481C1C}">
                 <a14:useLocalDpi xmlns:a14="http://schemas.microsoft.com/office/drawing/2010/main" val="0"/>
@@ -3692,8 +3684,8 @@
         </p:blipFill>
         <p:spPr>
           <a:xfrm>
-            <a:off x="749301" y="11396200"/>
-            <a:ext cx="4320000" cy="2495245"/>
+            <a:off x="454122" y="7010697"/>
+            <a:ext cx="2618182" cy="1512270"/>
           </a:xfrm>
           <a:prstGeom prst="rect">
             <a:avLst/>
@@ -3715,7 +3707,7 @@
           <p:nvPr/>
         </p:nvPicPr>
         <p:blipFill>
-          <a:blip r:embed="rId10">
+          <a:blip r:embed="rId10" cstate="print">
             <a:extLst>
               <a:ext uri="{28A0092B-C50C-407E-A947-70E740481C1C}">
                 <a14:useLocalDpi xmlns:a14="http://schemas.microsoft.com/office/drawing/2010/main" val="0"/>
@@ -3728,8 +3720,8 @@
         </p:blipFill>
         <p:spPr>
           <a:xfrm>
-            <a:off x="6252751" y="11393276"/>
-            <a:ext cx="4320000" cy="2517895"/>
+            <a:off x="3789546" y="7008926"/>
+            <a:ext cx="2618182" cy="1525997"/>
           </a:xfrm>
           <a:prstGeom prst="rect">
             <a:avLst/>
@@ -3750,8 +3742,8 @@
         </p:nvSpPr>
         <p:spPr>
           <a:xfrm>
-            <a:off x="6252751" y="6415450"/>
-            <a:ext cx="4320000" cy="642255"/>
+            <a:off x="3789546" y="3992062"/>
+            <a:ext cx="2618182" cy="389245"/>
           </a:xfrm>
           <a:prstGeom prst="rect">
             <a:avLst/>
@@ -3785,14 +3777,14 @@
           <a:p>
             <a:pPr algn="ctr"/>
             <a:r>
-              <a:rPr lang="en-US" altLang="ko-KR" sz="2400" dirty="0">
+              <a:rPr lang="en-US" altLang="ko-KR" sz="1455" dirty="0">
                 <a:latin typeface="LG스마트체2.0 SemiBold" panose="020B0600000101010101" pitchFamily="50" charset="-127"/>
                 <a:ea typeface="LG스마트체2.0 SemiBold" panose="020B0600000101010101" pitchFamily="50" charset="-127"/>
               </a:rPr>
               <a:t>2. </a:t>
             </a:r>
             <a:r>
-              <a:rPr lang="ko-KR" altLang="en-US" sz="2400" dirty="0">
+              <a:rPr lang="ko-KR" altLang="en-US" sz="1455" dirty="0">
                 <a:latin typeface="LG스마트체2.0 SemiBold" panose="020B0600000101010101" pitchFamily="50" charset="-127"/>
                 <a:ea typeface="LG스마트체2.0 SemiBold" panose="020B0600000101010101" pitchFamily="50" charset="-127"/>
               </a:rPr>
@@ -3816,7 +3808,7 @@
           <p:nvPr/>
         </p:nvPicPr>
         <p:blipFill>
-          <a:blip r:embed="rId11">
+          <a:blip r:embed="rId11" cstate="print">
             <a:extLst>
               <a:ext uri="{28A0092B-C50C-407E-A947-70E740481C1C}">
                 <a14:useLocalDpi xmlns:a14="http://schemas.microsoft.com/office/drawing/2010/main" val="0"/>
@@ -3829,8 +3821,8 @@
         </p:blipFill>
         <p:spPr>
           <a:xfrm>
-            <a:off x="749301" y="7023725"/>
-            <a:ext cx="4320000" cy="2529501"/>
+            <a:off x="454122" y="4360713"/>
+            <a:ext cx="2618182" cy="1533031"/>
           </a:xfrm>
           <a:prstGeom prst="rect">
             <a:avLst/>
@@ -3851,8 +3843,8 @@
         </p:nvSpPr>
         <p:spPr>
           <a:xfrm>
-            <a:off x="749301" y="6417411"/>
-            <a:ext cx="4320000" cy="642255"/>
+            <a:off x="454122" y="3993250"/>
+            <a:ext cx="2618182" cy="389245"/>
           </a:xfrm>
           <a:prstGeom prst="rect">
             <a:avLst/>
@@ -3886,14 +3878,14 @@
           <a:p>
             <a:pPr algn="ctr"/>
             <a:r>
-              <a:rPr lang="en-US" altLang="ko-KR" sz="2400" dirty="0">
+              <a:rPr lang="en-US" altLang="ko-KR" sz="1455" dirty="0">
                 <a:latin typeface="LG스마트체2.0 SemiBold" panose="020B0600000101010101" pitchFamily="50" charset="-127"/>
                 <a:ea typeface="LG스마트체2.0 SemiBold" panose="020B0600000101010101" pitchFamily="50" charset="-127"/>
               </a:rPr>
               <a:t>1. </a:t>
             </a:r>
             <a:r>
-              <a:rPr lang="ko-KR" altLang="en-US" sz="2400" dirty="0">
+              <a:rPr lang="ko-KR" altLang="en-US" sz="1455" dirty="0">
                 <a:latin typeface="LG스마트체2.0 SemiBold" panose="020B0600000101010101" pitchFamily="50" charset="-127"/>
                 <a:ea typeface="LG스마트체2.0 SemiBold" panose="020B0600000101010101" pitchFamily="50" charset="-127"/>
               </a:rPr>
@@ -3916,18 +3908,18 @@
         </p:nvSpPr>
         <p:spPr>
           <a:xfrm>
-            <a:off x="6259102" y="9567400"/>
-            <a:ext cx="4320000" cy="872000"/>
+            <a:off x="3793395" y="5902333"/>
+            <a:ext cx="2618182" cy="528485"/>
           </a:xfrm>
           <a:prstGeom prst="rect">
             <a:avLst/>
           </a:prstGeom>
         </p:spPr>
         <p:txBody>
-          <a:bodyPr lIns="0" tIns="30480" rIns="0" bIns="0" rtlCol="0" anchor="ctr"/>
+          <a:bodyPr lIns="0" tIns="18473" rIns="0" bIns="0" rtlCol="0" anchor="ctr"/>
           <a:lstStyle/>
           <a:p>
-            <a:pPr marL="342900" lvl="0" indent="-342900" algn="just">
+            <a:pPr marL="207846" indent="-207846" algn="just">
               <a:lnSpc>
                 <a:spcPct val="99600"/>
               </a:lnSpc>
@@ -3935,7 +3927,7 @@
               <a:buChar char="•"/>
             </a:pPr>
             <a:r>
-              <a:rPr lang="ko-KR" altLang="en-US" sz="2000" spc="-100" dirty="0">
+              <a:rPr lang="ko-KR" altLang="en-US" sz="1212" spc="-61" dirty="0">
                 <a:solidFill>
                   <a:srgbClr val="333333"/>
                 </a:solidFill>
@@ -3945,7 +3937,7 @@
               </a:rPr>
               <a:t>모든 플레이어 준비 완료 시 역할 선택</a:t>
             </a:r>
-            <a:endParaRPr lang="en-US" altLang="ko-KR" sz="2000" spc="-100" dirty="0">
+            <a:endParaRPr lang="en-US" altLang="ko-KR" sz="1212" spc="-61" dirty="0">
               <a:solidFill>
                 <a:srgbClr val="333333"/>
               </a:solidFill>
@@ -3955,7 +3947,7 @@
             </a:endParaRPr>
           </a:p>
           <a:p>
-            <a:pPr marL="342900" lvl="0" indent="-342900" algn="just">
+            <a:pPr marL="207846" indent="-207846" algn="just">
               <a:lnSpc>
                 <a:spcPct val="99600"/>
               </a:lnSpc>
@@ -3963,7 +3955,7 @@
               <a:buChar char="•"/>
             </a:pPr>
             <a:r>
-              <a:rPr lang="ko-KR" altLang="en-US" sz="2000" dirty="0">
+              <a:rPr lang="ko-KR" altLang="en-US" sz="1212" dirty="0">
                 <a:solidFill>
                   <a:srgbClr val="333333"/>
                 </a:solidFill>
@@ -3974,7 +3966,7 @@
               <a:t>출제자</a:t>
             </a:r>
             <a:r>
-              <a:rPr lang="en-US" altLang="ko-KR" sz="2000" dirty="0">
+              <a:rPr lang="en-US" altLang="ko-KR" sz="1212" dirty="0">
                 <a:solidFill>
                   <a:srgbClr val="333333"/>
                 </a:solidFill>
@@ -3985,7 +3977,7 @@
               <a:t>(Drawer) / </a:t>
             </a:r>
             <a:r>
-              <a:rPr lang="ko-KR" altLang="en-US" sz="2000" dirty="0">
+              <a:rPr lang="ko-KR" altLang="en-US" sz="1212" dirty="0">
                 <a:solidFill>
                   <a:srgbClr val="333333"/>
                 </a:solidFill>
@@ -3996,7 +3988,7 @@
               <a:t>참가자</a:t>
             </a:r>
             <a:r>
-              <a:rPr lang="en-US" altLang="ko-KR" sz="2000" dirty="0">
+              <a:rPr lang="en-US" altLang="ko-KR" sz="1212" dirty="0">
                 <a:solidFill>
                   <a:srgbClr val="333333"/>
                 </a:solidFill>
@@ -4023,8 +4015,8 @@
         </p:nvSpPr>
         <p:spPr>
           <a:xfrm>
-            <a:off x="6252751" y="10751021"/>
-            <a:ext cx="4320000" cy="642255"/>
+            <a:off x="3789546" y="6619681"/>
+            <a:ext cx="2618182" cy="389245"/>
           </a:xfrm>
           <a:prstGeom prst="rect">
             <a:avLst/>
@@ -4058,14 +4050,14 @@
           <a:p>
             <a:pPr algn="ctr"/>
             <a:r>
-              <a:rPr lang="en-US" altLang="ko-KR" sz="2400" dirty="0">
+              <a:rPr lang="en-US" altLang="ko-KR" sz="1455" dirty="0">
                 <a:latin typeface="LG스마트체2.0 SemiBold" panose="020B0600000101010101" pitchFamily="50" charset="-127"/>
                 <a:ea typeface="LG스마트체2.0 SemiBold" panose="020B0600000101010101" pitchFamily="50" charset="-127"/>
               </a:rPr>
               <a:t>4. </a:t>
             </a:r>
             <a:r>
-              <a:rPr lang="ko-KR" altLang="en-US" sz="2400" dirty="0">
+              <a:rPr lang="ko-KR" altLang="en-US" sz="1455" dirty="0">
                 <a:latin typeface="LG스마트체2.0 SemiBold" panose="020B0600000101010101" pitchFamily="50" charset="-127"/>
                 <a:ea typeface="LG스마트체2.0 SemiBold" panose="020B0600000101010101" pitchFamily="50" charset="-127"/>
               </a:rPr>
@@ -4088,8 +4080,8 @@
         </p:nvSpPr>
         <p:spPr>
           <a:xfrm>
-            <a:off x="749301" y="10771297"/>
-            <a:ext cx="4320000" cy="621979"/>
+            <a:off x="454122" y="6631969"/>
+            <a:ext cx="2618182" cy="376957"/>
           </a:xfrm>
           <a:prstGeom prst="rect">
             <a:avLst/>
@@ -4123,14 +4115,14 @@
           <a:p>
             <a:pPr algn="ctr"/>
             <a:r>
-              <a:rPr lang="en-US" altLang="ko-KR" sz="2400" dirty="0">
+              <a:rPr lang="en-US" altLang="ko-KR" sz="1455" dirty="0">
                 <a:latin typeface="LG스마트체2.0 SemiBold" panose="020B0600000101010101" pitchFamily="50" charset="-127"/>
                 <a:ea typeface="LG스마트체2.0 SemiBold" panose="020B0600000101010101" pitchFamily="50" charset="-127"/>
               </a:rPr>
               <a:t>3. </a:t>
             </a:r>
             <a:r>
-              <a:rPr lang="ko-KR" altLang="en-US" sz="2400" dirty="0">
+              <a:rPr lang="ko-KR" altLang="en-US" sz="1455" dirty="0">
                 <a:latin typeface="LG스마트체2.0 SemiBold" panose="020B0600000101010101" pitchFamily="50" charset="-127"/>
                 <a:ea typeface="LG스마트체2.0 SemiBold" panose="020B0600000101010101" pitchFamily="50" charset="-127"/>
               </a:rPr>
@@ -4153,18 +4145,18 @@
         </p:nvSpPr>
         <p:spPr>
           <a:xfrm>
-            <a:off x="749301" y="9567400"/>
-            <a:ext cx="4320000" cy="872000"/>
+            <a:off x="454122" y="5902333"/>
+            <a:ext cx="2618182" cy="528485"/>
           </a:xfrm>
           <a:prstGeom prst="rect">
             <a:avLst/>
           </a:prstGeom>
         </p:spPr>
         <p:txBody>
-          <a:bodyPr lIns="0" tIns="30480" rIns="0" bIns="0" rtlCol="0" anchor="ctr"/>
+          <a:bodyPr lIns="0" tIns="18473" rIns="0" bIns="0" rtlCol="0" anchor="ctr"/>
           <a:lstStyle/>
           <a:p>
-            <a:pPr marL="342900" lvl="0" indent="-342900" algn="just">
+            <a:pPr marL="207846" indent="-207846" algn="just">
               <a:lnSpc>
                 <a:spcPct val="99600"/>
               </a:lnSpc>
@@ -4172,7 +4164,7 @@
               <a:buChar char="•"/>
             </a:pPr>
             <a:r>
-              <a:rPr lang="ko-KR" altLang="en-US" sz="2000" dirty="0">
+              <a:rPr lang="ko-KR" altLang="en-US" sz="1212" dirty="0">
                 <a:solidFill>
                   <a:srgbClr val="333333"/>
                 </a:solidFill>
@@ -4182,7 +4174,7 @@
               </a:rPr>
               <a:t>게임 시작을 눌러 준비 완료</a:t>
             </a:r>
-            <a:endParaRPr lang="en-US" altLang="ko-KR" sz="2000" dirty="0">
+            <a:endParaRPr lang="en-US" altLang="ko-KR" sz="1212" dirty="0">
               <a:solidFill>
                 <a:srgbClr val="333333"/>
               </a:solidFill>
@@ -4207,18 +4199,18 @@
         </p:nvSpPr>
         <p:spPr>
           <a:xfrm>
-            <a:off x="6259102" y="13910800"/>
-            <a:ext cx="4320000" cy="872000"/>
+            <a:off x="3793395" y="8534698"/>
+            <a:ext cx="2618182" cy="528485"/>
           </a:xfrm>
           <a:prstGeom prst="rect">
             <a:avLst/>
           </a:prstGeom>
         </p:spPr>
         <p:txBody>
-          <a:bodyPr lIns="0" tIns="30480" rIns="0" bIns="0" rtlCol="0" anchor="ctr"/>
+          <a:bodyPr lIns="0" tIns="18473" rIns="0" bIns="0" rtlCol="0" anchor="ctr"/>
           <a:lstStyle/>
           <a:p>
-            <a:pPr marL="342900" lvl="0" indent="-342900" algn="just">
+            <a:pPr marL="207846" indent="-207846" algn="just">
               <a:lnSpc>
                 <a:spcPct val="99600"/>
               </a:lnSpc>
@@ -4226,7 +4218,7 @@
               <a:buChar char="•"/>
             </a:pPr>
             <a:r>
-              <a:rPr lang="ko-KR" altLang="en-US" sz="2000" dirty="0">
+              <a:rPr lang="ko-KR" altLang="en-US" sz="1212" dirty="0">
                 <a:solidFill>
                   <a:srgbClr val="333333"/>
                 </a:solidFill>
@@ -4236,7 +4228,7 @@
               </a:rPr>
               <a:t>선택한 카테고리 내 단어 목록 중 하나의 단어를 선택</a:t>
             </a:r>
-            <a:endParaRPr lang="en-US" altLang="ko-KR" sz="2000" dirty="0">
+            <a:endParaRPr lang="en-US" altLang="ko-KR" sz="1212" dirty="0">
               <a:solidFill>
                 <a:srgbClr val="333333"/>
               </a:solidFill>
@@ -4261,18 +4253,18 @@
         </p:nvSpPr>
         <p:spPr>
           <a:xfrm>
-            <a:off x="749301" y="13910800"/>
-            <a:ext cx="4320000" cy="872000"/>
+            <a:off x="454122" y="8534698"/>
+            <a:ext cx="2618182" cy="528485"/>
           </a:xfrm>
           <a:prstGeom prst="rect">
             <a:avLst/>
           </a:prstGeom>
         </p:spPr>
         <p:txBody>
-          <a:bodyPr lIns="0" tIns="30480" rIns="0" bIns="0" rtlCol="0" anchor="ctr"/>
+          <a:bodyPr lIns="0" tIns="18473" rIns="0" bIns="0" rtlCol="0" anchor="ctr"/>
           <a:lstStyle/>
           <a:p>
-            <a:pPr marL="342900" lvl="0" indent="-342900" algn="just">
+            <a:pPr marL="207846" indent="-207846" algn="just">
               <a:lnSpc>
                 <a:spcPct val="99600"/>
               </a:lnSpc>
@@ -4280,7 +4272,7 @@
               <a:buChar char="•"/>
             </a:pPr>
             <a:r>
-              <a:rPr lang="ko-KR" altLang="en-US" sz="2000" dirty="0">
+              <a:rPr lang="ko-KR" altLang="en-US" sz="1212" dirty="0">
                 <a:solidFill>
                   <a:srgbClr val="333333"/>
                 </a:solidFill>
@@ -4290,7 +4282,7 @@
               </a:rPr>
               <a:t>출제자가 문제 카테고리 선택</a:t>
             </a:r>
-            <a:endParaRPr lang="en-US" altLang="ko-KR" sz="2000" dirty="0">
+            <a:endParaRPr lang="en-US" altLang="ko-KR" sz="1212" dirty="0">
               <a:solidFill>
                 <a:srgbClr val="333333"/>
               </a:solidFill>
@@ -4315,8 +4307,8 @@
         </p:nvGrpSpPr>
         <p:grpSpPr>
           <a:xfrm>
-            <a:off x="330200" y="2089149"/>
-            <a:ext cx="10655300" cy="1003300"/>
+            <a:off x="200122" y="1370061"/>
+            <a:ext cx="6457758" cy="608061"/>
             <a:chOff x="330200" y="7461250"/>
             <a:chExt cx="10655300" cy="1003300"/>
           </a:xfrm>
@@ -4403,7 +4395,7 @@
             </a:prstGeom>
           </p:spPr>
           <p:txBody>
-            <a:bodyPr lIns="0" tIns="40640" rIns="0" bIns="0" rtlCol="0" anchor="t"/>
+            <a:bodyPr lIns="0" tIns="24630" rIns="0" bIns="0" rtlCol="0" anchor="t"/>
             <a:lstStyle/>
             <a:p>
               <a:pPr lvl="0">
@@ -4412,7 +4404,7 @@
                 </a:lnSpc>
               </a:pPr>
               <a:r>
-                <a:rPr lang="ko-KR" altLang="en-US" sz="3200" b="0" i="0" u="none" strike="noStrike" dirty="0">
+                <a:rPr lang="ko-KR" altLang="en-US" sz="1940" dirty="0">
                   <a:solidFill>
                     <a:srgbClr val="FAFAFA"/>
                   </a:solidFill>
@@ -4422,7 +4414,7 @@
                 </a:rPr>
                 <a:t>프로젝트 개요</a:t>
               </a:r>
-              <a:endParaRPr lang="en-US" sz="3200" b="0" i="0" u="none" strike="noStrike" dirty="0">
+              <a:endParaRPr lang="en-US" sz="1940" dirty="0">
                 <a:solidFill>
                   <a:srgbClr val="FAFAFA"/>
                 </a:solidFill>
@@ -4455,7 +4447,7 @@
             </a:prstGeom>
           </p:spPr>
           <p:txBody>
-            <a:bodyPr lIns="0" tIns="40640" rIns="0" bIns="0" rtlCol="0" anchor="t"/>
+            <a:bodyPr lIns="0" tIns="24630" rIns="0" bIns="0" rtlCol="0" anchor="t"/>
             <a:lstStyle/>
             <a:p>
               <a:pPr lvl="0" algn="ctr">
@@ -4464,7 +4456,7 @@
                 </a:lnSpc>
               </a:pPr>
               <a:r>
-                <a:rPr lang="en-US" altLang="ko-KR" sz="3200" b="0" i="0" u="none" strike="noStrike" dirty="0">
+                <a:rPr lang="en-US" altLang="ko-KR" sz="1940" dirty="0">
                   <a:solidFill>
                     <a:srgbClr val="FAFAFA"/>
                   </a:solidFill>
@@ -4474,7 +4466,7 @@
                 </a:rPr>
                 <a:t>01</a:t>
               </a:r>
-              <a:endParaRPr lang="en-US" sz="3200" b="0" i="0" u="none" strike="noStrike" dirty="0">
+              <a:endParaRPr lang="en-US" sz="1940" dirty="0">
                 <a:solidFill>
                   <a:srgbClr val="FAFAFA"/>
                 </a:solidFill>
@@ -4500,18 +4492,18 @@
         </p:nvSpPr>
         <p:spPr>
           <a:xfrm>
-            <a:off x="800100" y="3214726"/>
-            <a:ext cx="10191750" cy="1509674"/>
+            <a:off x="484909" y="2052228"/>
+            <a:ext cx="6176818" cy="914954"/>
           </a:xfrm>
           <a:prstGeom prst="rect">
             <a:avLst/>
           </a:prstGeom>
         </p:spPr>
         <p:txBody>
-          <a:bodyPr lIns="0" tIns="30480" rIns="0" bIns="0" rtlCol="0" anchor="t"/>
+          <a:bodyPr lIns="0" tIns="18473" rIns="0" bIns="0" rtlCol="0" anchor="t"/>
           <a:lstStyle/>
           <a:p>
-            <a:pPr marL="342900" lvl="0" indent="-342900" algn="l">
+            <a:pPr marL="207846" indent="-207846">
               <a:lnSpc>
                 <a:spcPct val="99600"/>
               </a:lnSpc>
@@ -4519,7 +4511,7 @@
               <a:buChar char="•"/>
             </a:pPr>
             <a:r>
-              <a:rPr lang="ko-KR" altLang="en-US" sz="2400" dirty="0">
+              <a:rPr lang="ko-KR" altLang="en-US" sz="1455" dirty="0">
                 <a:solidFill>
                   <a:srgbClr val="333333"/>
                 </a:solidFill>
@@ -4529,7 +4521,7 @@
               </a:rPr>
               <a:t>실시간 멀티보드 기반 그림 맞추기 게임</a:t>
             </a:r>
-            <a:endParaRPr lang="en-US" altLang="ko-KR" sz="2400" dirty="0">
+            <a:endParaRPr lang="en-US" altLang="ko-KR" sz="1455" dirty="0">
               <a:solidFill>
                 <a:srgbClr val="333333"/>
               </a:solidFill>
@@ -4539,7 +4531,7 @@
             </a:endParaRPr>
           </a:p>
           <a:p>
-            <a:pPr marL="342900" lvl="0" indent="-342900" algn="l">
+            <a:pPr marL="207846" indent="-207846">
               <a:lnSpc>
                 <a:spcPct val="99600"/>
               </a:lnSpc>
@@ -4547,7 +4539,7 @@
               <a:buChar char="•"/>
             </a:pPr>
             <a:r>
-              <a:rPr lang="ko-KR" altLang="en-US" sz="2400" dirty="0">
+              <a:rPr lang="ko-KR" altLang="en-US" sz="1455" dirty="0">
                 <a:solidFill>
                   <a:srgbClr val="333333"/>
                 </a:solidFill>
@@ -4558,7 +4550,7 @@
               <a:t>출제자 </a:t>
             </a:r>
             <a:r>
-              <a:rPr lang="en-US" altLang="ko-KR" sz="2400" dirty="0">
+              <a:rPr lang="en-US" altLang="ko-KR" sz="1455" dirty="0">
                 <a:solidFill>
                   <a:srgbClr val="333333"/>
                 </a:solidFill>
@@ -4569,7 +4561,7 @@
               <a:t>1</a:t>
             </a:r>
             <a:r>
-              <a:rPr lang="ko-KR" altLang="en-US" sz="2400" dirty="0">
+              <a:rPr lang="ko-KR" altLang="en-US" sz="1455" dirty="0">
                 <a:solidFill>
                   <a:srgbClr val="333333"/>
                 </a:solidFill>
@@ -4580,7 +4572,7 @@
               <a:t>명 </a:t>
             </a:r>
             <a:r>
-              <a:rPr lang="en-US" altLang="ko-KR" sz="2400" dirty="0">
+              <a:rPr lang="en-US" altLang="ko-KR" sz="1455" dirty="0">
                 <a:solidFill>
                   <a:srgbClr val="333333"/>
                 </a:solidFill>
@@ -4591,7 +4583,7 @@
               <a:t>+ </a:t>
             </a:r>
             <a:r>
-              <a:rPr lang="ko-KR" altLang="en-US" sz="2400" dirty="0">
+              <a:rPr lang="ko-KR" altLang="en-US" sz="1455" dirty="0">
                 <a:solidFill>
                   <a:srgbClr val="333333"/>
                 </a:solidFill>
@@ -4602,7 +4594,7 @@
               <a:t>도전자 </a:t>
             </a:r>
             <a:r>
-              <a:rPr lang="en-US" altLang="ko-KR" sz="2400" dirty="0">
+              <a:rPr lang="en-US" altLang="ko-KR" sz="1455" dirty="0">
                 <a:solidFill>
                   <a:srgbClr val="333333"/>
                 </a:solidFill>
@@ -4613,7 +4605,7 @@
               <a:t>2</a:t>
             </a:r>
             <a:r>
-              <a:rPr lang="ko-KR" altLang="en-US" sz="2400" dirty="0">
+              <a:rPr lang="ko-KR" altLang="en-US" sz="1455" dirty="0">
                 <a:solidFill>
                   <a:srgbClr val="333333"/>
                 </a:solidFill>
@@ -4623,7 +4615,7 @@
               </a:rPr>
               <a:t>명 구조</a:t>
             </a:r>
-            <a:endParaRPr lang="en-US" altLang="ko-KR" sz="2400" dirty="0">
+            <a:endParaRPr lang="en-US" altLang="ko-KR" sz="1455" dirty="0">
               <a:solidFill>
                 <a:srgbClr val="333333"/>
               </a:solidFill>
@@ -4633,7 +4625,7 @@
             </a:endParaRPr>
           </a:p>
           <a:p>
-            <a:pPr marL="342900" lvl="0" indent="-342900" algn="l">
+            <a:pPr marL="207846" indent="-207846">
               <a:lnSpc>
                 <a:spcPct val="99600"/>
               </a:lnSpc>
@@ -4641,7 +4633,7 @@
               <a:buChar char="•"/>
             </a:pPr>
             <a:r>
-              <a:rPr lang="ko-KR" altLang="en-US" sz="2400" dirty="0">
+              <a:rPr lang="ko-KR" altLang="en-US" sz="1455" dirty="0">
                 <a:solidFill>
                   <a:srgbClr val="333333"/>
                 </a:solidFill>
@@ -4652,7 +4644,7 @@
               <a:t>총 </a:t>
             </a:r>
             <a:r>
-              <a:rPr lang="en-US" altLang="ko-KR" sz="2400" dirty="0">
+              <a:rPr lang="en-US" altLang="ko-KR" sz="1455" dirty="0">
                 <a:solidFill>
                   <a:srgbClr val="333333"/>
                 </a:solidFill>
@@ -4663,7 +4655,7 @@
               <a:t>5</a:t>
             </a:r>
             <a:r>
-              <a:rPr lang="ko-KR" altLang="en-US" sz="2400" dirty="0">
+              <a:rPr lang="ko-KR" altLang="en-US" sz="1455" dirty="0">
                 <a:solidFill>
                   <a:srgbClr val="333333"/>
                 </a:solidFill>
@@ -4674,7 +4666,7 @@
               <a:t>라운드</a:t>
             </a:r>
             <a:r>
-              <a:rPr lang="en-US" altLang="ko-KR" sz="2400" dirty="0">
+              <a:rPr lang="en-US" altLang="ko-KR" sz="1455" dirty="0">
                 <a:solidFill>
                   <a:srgbClr val="333333"/>
                 </a:solidFill>
@@ -4685,7 +4677,7 @@
               <a:t>, </a:t>
             </a:r>
             <a:r>
-              <a:rPr lang="ko-KR" altLang="en-US" sz="2400" dirty="0">
+              <a:rPr lang="ko-KR" altLang="en-US" sz="1455" dirty="0">
                 <a:solidFill>
                   <a:srgbClr val="333333"/>
                 </a:solidFill>
@@ -4696,7 +4688,7 @@
               <a:t>라운드당 </a:t>
             </a:r>
             <a:r>
-              <a:rPr lang="en-US" altLang="ko-KR" sz="2400" dirty="0">
+              <a:rPr lang="en-US" altLang="ko-KR" sz="1455" dirty="0">
                 <a:solidFill>
                   <a:srgbClr val="333333"/>
                 </a:solidFill>
@@ -4707,7 +4699,7 @@
               <a:t>60</a:t>
             </a:r>
             <a:r>
-              <a:rPr lang="ko-KR" altLang="en-US" sz="2400" dirty="0">
+              <a:rPr lang="ko-KR" altLang="en-US" sz="1455" dirty="0">
                 <a:solidFill>
                   <a:srgbClr val="333333"/>
                 </a:solidFill>
@@ -4717,7 +4709,7 @@
               </a:rPr>
               <a:t>초 제한</a:t>
             </a:r>
-            <a:endParaRPr lang="en-US" altLang="ko-KR" sz="2400" dirty="0">
+            <a:endParaRPr lang="en-US" altLang="ko-KR" sz="1455" dirty="0">
               <a:solidFill>
                 <a:srgbClr val="333333"/>
               </a:solidFill>
@@ -4727,7 +4719,7 @@
             </a:endParaRPr>
           </a:p>
           <a:p>
-            <a:pPr marL="342900" lvl="0" indent="-342900" algn="l">
+            <a:pPr marL="207846" indent="-207846">
               <a:lnSpc>
                 <a:spcPct val="99600"/>
               </a:lnSpc>
@@ -4735,7 +4727,7 @@
               <a:buChar char="•"/>
             </a:pPr>
             <a:r>
-              <a:rPr lang="ko-KR" altLang="en-US" sz="2400" dirty="0">
+              <a:rPr lang="ko-KR" altLang="en-US" sz="1455" dirty="0">
                 <a:solidFill>
                   <a:srgbClr val="333333"/>
                 </a:solidFill>
@@ -4746,7 +4738,7 @@
               <a:t>카테고리 기반 단어 출제 </a:t>
             </a:r>
             <a:r>
-              <a:rPr lang="en-US" altLang="ko-KR" sz="2400" dirty="0">
+              <a:rPr lang="en-US" altLang="ko-KR" sz="1455" dirty="0">
                 <a:solidFill>
                   <a:srgbClr val="333333"/>
                 </a:solidFill>
@@ -4757,7 +4749,7 @@
               <a:t>(</a:t>
             </a:r>
             <a:r>
-              <a:rPr lang="ko-KR" altLang="en-US" sz="2400" dirty="0">
+              <a:rPr lang="ko-KR" altLang="en-US" sz="1455" dirty="0">
                 <a:solidFill>
                   <a:srgbClr val="333333"/>
                 </a:solidFill>
@@ -4768,7 +4760,7 @@
               <a:t>동물</a:t>
             </a:r>
             <a:r>
-              <a:rPr lang="en-US" altLang="ko-KR" sz="2400" dirty="0">
+              <a:rPr lang="en-US" altLang="ko-KR" sz="1455" dirty="0">
                 <a:solidFill>
                   <a:srgbClr val="333333"/>
                 </a:solidFill>
@@ -4779,7 +4771,7 @@
               <a:t>, </a:t>
             </a:r>
             <a:r>
-              <a:rPr lang="ko-KR" altLang="en-US" sz="2400" dirty="0">
+              <a:rPr lang="ko-KR" altLang="en-US" sz="1455" dirty="0">
                 <a:solidFill>
                   <a:srgbClr val="333333"/>
                 </a:solidFill>
@@ -4790,7 +4782,7 @@
               <a:t>음식 등 </a:t>
             </a:r>
             <a:r>
-              <a:rPr lang="en-US" altLang="ko-KR" sz="2400" dirty="0">
+              <a:rPr lang="en-US" altLang="ko-KR" sz="1455" dirty="0">
                 <a:solidFill>
                   <a:srgbClr val="333333"/>
                 </a:solidFill>
@@ -4801,7 +4793,7 @@
               <a:t>7</a:t>
             </a:r>
             <a:r>
-              <a:rPr lang="ko-KR" altLang="en-US" sz="2400" dirty="0">
+              <a:rPr lang="ko-KR" altLang="en-US" sz="1455" dirty="0">
                 <a:solidFill>
                   <a:srgbClr val="333333"/>
                 </a:solidFill>
@@ -4812,7 +4804,7 @@
               <a:t>개의 카테고리</a:t>
             </a:r>
             <a:r>
-              <a:rPr lang="en-US" altLang="ko-KR" sz="2400" dirty="0">
+              <a:rPr lang="en-US" altLang="ko-KR" sz="1455" dirty="0">
                 <a:solidFill>
                   <a:srgbClr val="333333"/>
                 </a:solidFill>
@@ -4823,7 +4815,7 @@
               <a:t>)</a:t>
             </a:r>
             <a:r>
-              <a:rPr lang="ko-KR" altLang="en-US" sz="2400" dirty="0">
+              <a:rPr lang="ko-KR" altLang="en-US" sz="1455" dirty="0">
                 <a:solidFill>
                   <a:srgbClr val="333333"/>
                 </a:solidFill>
@@ -4833,7 +4825,7 @@
               </a:rPr>
               <a:t> </a:t>
             </a:r>
-            <a:endParaRPr lang="en-US" altLang="ko-KR" sz="2400" dirty="0">
+            <a:endParaRPr lang="en-US" altLang="ko-KR" sz="1455" dirty="0">
               <a:solidFill>
                 <a:srgbClr val="333333"/>
               </a:solidFill>
@@ -4902,8 +4894,8 @@
         </p:blipFill>
         <p:spPr>
           <a:xfrm>
-            <a:off x="0" y="15036800"/>
-            <a:ext cx="11315700" cy="977900"/>
+            <a:off x="0" y="9313333"/>
+            <a:ext cx="6858000" cy="592667"/>
           </a:xfrm>
           <a:prstGeom prst="rect">
             <a:avLst/>
@@ -4932,8 +4924,8 @@
         </p:blipFill>
         <p:spPr>
           <a:xfrm>
-            <a:off x="0" y="-25400"/>
-            <a:ext cx="11315700" cy="2082800"/>
+            <a:off x="0" y="0"/>
+            <a:ext cx="6858000" cy="1262303"/>
           </a:xfrm>
           <a:prstGeom prst="rect">
             <a:avLst/>
@@ -4962,8 +4954,8 @@
         </p:blipFill>
         <p:spPr>
           <a:xfrm rot="10800000">
-            <a:off x="7023100" y="0"/>
-            <a:ext cx="4292600" cy="2063604"/>
+            <a:off x="4256424" y="15394"/>
+            <a:ext cx="2601576" cy="1250669"/>
           </a:xfrm>
           <a:prstGeom prst="rect">
             <a:avLst/>
@@ -4992,8 +4984,8 @@
         </p:blipFill>
         <p:spPr>
           <a:xfrm rot="10800000">
-            <a:off x="0" y="-12700"/>
-            <a:ext cx="3962400" cy="2063604"/>
+            <a:off x="0" y="7696"/>
+            <a:ext cx="2401455" cy="1250669"/>
           </a:xfrm>
           <a:prstGeom prst="rect">
             <a:avLst/>
@@ -5014,15 +5006,15 @@
         </p:nvSpPr>
         <p:spPr>
           <a:xfrm>
-            <a:off x="3022600" y="15379700"/>
-            <a:ext cx="5283200" cy="330200"/>
+            <a:off x="1831880" y="9521152"/>
+            <a:ext cx="3201939" cy="200121"/>
           </a:xfrm>
           <a:prstGeom prst="rect">
             <a:avLst/>
           </a:prstGeom>
         </p:spPr>
         <p:txBody>
-          <a:bodyPr lIns="0" tIns="23707" rIns="0" bIns="0" rtlCol="0" anchor="t"/>
+          <a:bodyPr lIns="0" tIns="14368" rIns="0" bIns="0" rtlCol="0" anchor="t"/>
           <a:lstStyle/>
           <a:p>
             <a:pPr lvl="0" algn="ctr">
@@ -5031,7 +5023,7 @@
               </a:lnSpc>
             </a:pPr>
             <a:r>
-              <a:rPr lang="en-US" sz="1866" b="1" dirty="0">
+              <a:rPr lang="en-US" sz="1131" b="1" dirty="0">
                 <a:solidFill>
                   <a:srgbClr val="FAFAFA"/>
                 </a:solidFill>
@@ -5041,14 +5033,6 @@
               </a:rPr>
               <a:t>LG ELECTRONICS</a:t>
             </a:r>
-            <a:endParaRPr lang="en-US" sz="1866" b="1" i="0" u="none" strike="noStrike" dirty="0">
-              <a:solidFill>
-                <a:srgbClr val="FAFAFA"/>
-              </a:solidFill>
-              <a:latin typeface="LG스마트체2.0 Bold" panose="020B0600000101010101" pitchFamily="50" charset="-127"/>
-              <a:ea typeface="LG스마트체2.0 Bold" panose="020B0600000101010101" pitchFamily="50" charset="-127"/>
-              <a:cs typeface="Montserrat Bold"/>
-            </a:endParaRPr>
           </a:p>
         </p:txBody>
       </p:sp>
@@ -5066,15 +5050,15 @@
         </p:nvSpPr>
         <p:spPr>
           <a:xfrm>
-            <a:off x="736600" y="533400"/>
-            <a:ext cx="9829800" cy="1384300"/>
+            <a:off x="446425" y="338666"/>
+            <a:ext cx="5957455" cy="838970"/>
           </a:xfrm>
           <a:prstGeom prst="rect">
             <a:avLst/>
           </a:prstGeom>
         </p:spPr>
         <p:txBody>
-          <a:bodyPr lIns="0" tIns="115146" rIns="0" bIns="0" rtlCol="0" anchor="t"/>
+          <a:bodyPr lIns="0" tIns="69785" rIns="0" bIns="0" rtlCol="0" anchor="t"/>
           <a:lstStyle/>
           <a:p>
             <a:pPr lvl="0" algn="ctr">
@@ -5083,7 +5067,7 @@
               </a:lnSpc>
             </a:pPr>
             <a:r>
-              <a:rPr lang="ko-KR" altLang="en-US" sz="4533" b="0" i="0" u="none" strike="noStrike" dirty="0">
+              <a:rPr lang="ko-KR" altLang="en-US" sz="2747" dirty="0">
                 <a:solidFill>
                   <a:srgbClr val="FAFAFA"/>
                 </a:solidFill>
@@ -5093,7 +5077,7 @@
               </a:rPr>
               <a:t>캐치마인드</a:t>
             </a:r>
-            <a:endParaRPr lang="en-US" sz="4533" b="0" i="0" u="none" strike="noStrike" dirty="0">
+            <a:endParaRPr lang="en-US" sz="2747" dirty="0">
               <a:solidFill>
                 <a:srgbClr val="FAFAFA"/>
               </a:solidFill>
@@ -5118,8 +5102,8 @@
         </p:nvGrpSpPr>
         <p:grpSpPr>
           <a:xfrm>
-            <a:off x="330200" y="2089149"/>
-            <a:ext cx="10655300" cy="1003300"/>
+            <a:off x="200122" y="1370061"/>
+            <a:ext cx="6457758" cy="608061"/>
             <a:chOff x="330200" y="7461250"/>
             <a:chExt cx="10655300" cy="1003300"/>
           </a:xfrm>
@@ -5206,7 +5190,7 @@
             </a:prstGeom>
           </p:spPr>
           <p:txBody>
-            <a:bodyPr lIns="0" tIns="40640" rIns="0" bIns="0" rtlCol="0" anchor="t"/>
+            <a:bodyPr lIns="0" tIns="24630" rIns="0" bIns="0" rtlCol="0" anchor="t"/>
             <a:lstStyle/>
             <a:p>
               <a:pPr lvl="0">
@@ -5215,7 +5199,7 @@
                 </a:lnSpc>
               </a:pPr>
               <a:r>
-                <a:rPr lang="ko-KR" altLang="en-US" sz="3200" b="0" i="0" u="none" strike="noStrike" dirty="0">
+                <a:rPr lang="ko-KR" altLang="en-US" sz="1940" dirty="0">
                   <a:solidFill>
                     <a:srgbClr val="FAFAFA"/>
                   </a:solidFill>
@@ -5225,7 +5209,7 @@
                 </a:rPr>
                 <a:t>게임 방식</a:t>
               </a:r>
-              <a:endParaRPr lang="en-US" sz="3200" b="0" i="0" u="none" strike="noStrike" dirty="0">
+              <a:endParaRPr lang="en-US" sz="1940" dirty="0">
                 <a:solidFill>
                   <a:srgbClr val="FAFAFA"/>
                 </a:solidFill>
@@ -5258,7 +5242,7 @@
             </a:prstGeom>
           </p:spPr>
           <p:txBody>
-            <a:bodyPr lIns="0" tIns="40640" rIns="0" bIns="0" rtlCol="0" anchor="t"/>
+            <a:bodyPr lIns="0" tIns="24630" rIns="0" bIns="0" rtlCol="0" anchor="t"/>
             <a:lstStyle/>
             <a:p>
               <a:pPr lvl="0" algn="ctr">
@@ -5267,7 +5251,7 @@
                 </a:lnSpc>
               </a:pPr>
               <a:r>
-                <a:rPr lang="en-US" altLang="ko-KR" sz="3200" b="0" i="0" u="none" strike="noStrike" dirty="0">
+                <a:rPr lang="en-US" altLang="ko-KR" sz="1940" dirty="0">
                   <a:solidFill>
                     <a:srgbClr val="FAFAFA"/>
                   </a:solidFill>
@@ -5277,7 +5261,7 @@
                 </a:rPr>
                 <a:t>02</a:t>
               </a:r>
-              <a:endParaRPr lang="en-US" sz="3200" b="0" i="0" u="none" strike="noStrike" dirty="0">
+              <a:endParaRPr lang="en-US" sz="1940" dirty="0">
                 <a:solidFill>
                   <a:srgbClr val="FAFAFA"/>
                 </a:solidFill>
@@ -5303,8 +5287,8 @@
         </p:nvSpPr>
         <p:spPr>
           <a:xfrm>
-            <a:off x="6252751" y="3354125"/>
-            <a:ext cx="4320000" cy="642255"/>
+            <a:off x="3789546" y="2136713"/>
+            <a:ext cx="2618182" cy="389245"/>
           </a:xfrm>
           <a:prstGeom prst="rect">
             <a:avLst/>
@@ -5338,41 +5322,41 @@
           <a:p>
             <a:pPr algn="ctr"/>
             <a:r>
-              <a:rPr lang="en-US" altLang="ko-KR" sz="2400" dirty="0">
+              <a:rPr lang="en-US" altLang="ko-KR" sz="1455" dirty="0">
                 <a:latin typeface="LG스마트체2.0 SemiBold" panose="020B0600000101010101" pitchFamily="50" charset="-127"/>
                 <a:ea typeface="LG스마트체2.0 SemiBold" panose="020B0600000101010101" pitchFamily="50" charset="-127"/>
               </a:rPr>
               <a:t>6. </a:t>
             </a:r>
             <a:r>
-              <a:rPr lang="ko-KR" altLang="en-US" sz="2400" dirty="0">
+              <a:rPr lang="ko-KR" altLang="en-US" sz="1455" dirty="0">
                 <a:latin typeface="LG스마트체2.0 SemiBold" panose="020B0600000101010101" pitchFamily="50" charset="-127"/>
                 <a:ea typeface="LG스마트체2.0 SemiBold" panose="020B0600000101010101" pitchFamily="50" charset="-127"/>
               </a:rPr>
               <a:t>게임 진행 화면 </a:t>
             </a:r>
             <a:r>
-              <a:rPr lang="en-US" altLang="ko-KR" sz="2400" dirty="0">
+              <a:rPr lang="en-US" altLang="ko-KR" sz="1455" dirty="0">
                 <a:latin typeface="LG스마트체2.0 SemiBold" panose="020B0600000101010101" pitchFamily="50" charset="-127"/>
                 <a:ea typeface="LG스마트체2.0 SemiBold" panose="020B0600000101010101" pitchFamily="50" charset="-127"/>
               </a:rPr>
               <a:t>(</a:t>
             </a:r>
             <a:r>
-              <a:rPr lang="ko-KR" altLang="en-US" sz="2400" dirty="0">
+              <a:rPr lang="ko-KR" altLang="en-US" sz="1455" dirty="0">
                 <a:latin typeface="LG스마트체2.0 SemiBold" panose="020B0600000101010101" pitchFamily="50" charset="-127"/>
                 <a:ea typeface="LG스마트체2.0 SemiBold" panose="020B0600000101010101" pitchFamily="50" charset="-127"/>
               </a:rPr>
               <a:t>출제자</a:t>
             </a:r>
             <a:r>
-              <a:rPr lang="en-US" altLang="ko-KR" sz="2400" dirty="0">
+              <a:rPr lang="en-US" altLang="ko-KR" sz="1455" dirty="0">
                 <a:latin typeface="LG스마트체2.0 SemiBold" panose="020B0600000101010101" pitchFamily="50" charset="-127"/>
                 <a:ea typeface="LG스마트체2.0 SemiBold" panose="020B0600000101010101" pitchFamily="50" charset="-127"/>
               </a:rPr>
               <a:t>)</a:t>
             </a:r>
-            <a:endParaRPr lang="ko-KR" altLang="en-US" sz="2400" dirty="0">
+            <a:endParaRPr lang="ko-KR" altLang="en-US" sz="1455" dirty="0">
               <a:latin typeface="LG스마트체2.0 SemiBold" panose="020B0600000101010101" pitchFamily="50" charset="-127"/>
               <a:ea typeface="LG스마트체2.0 SemiBold" panose="020B0600000101010101" pitchFamily="50" charset="-127"/>
             </a:endParaRPr>
@@ -5393,8 +5377,8 @@
         </p:nvSpPr>
         <p:spPr>
           <a:xfrm>
-            <a:off x="749301" y="3356086"/>
-            <a:ext cx="4320000" cy="642255"/>
+            <a:off x="454122" y="2137902"/>
+            <a:ext cx="2618182" cy="389245"/>
           </a:xfrm>
           <a:prstGeom prst="rect">
             <a:avLst/>
@@ -5428,41 +5412,41 @@
           <a:p>
             <a:pPr algn="ctr"/>
             <a:r>
-              <a:rPr lang="en-US" altLang="ko-KR" sz="2400" dirty="0">
+              <a:rPr lang="en-US" altLang="ko-KR" sz="1455" dirty="0">
                 <a:latin typeface="LG스마트체2.0 SemiBold" panose="020B0600000101010101" pitchFamily="50" charset="-127"/>
                 <a:ea typeface="LG스마트체2.0 SemiBold" panose="020B0600000101010101" pitchFamily="50" charset="-127"/>
               </a:rPr>
               <a:t>5. </a:t>
             </a:r>
             <a:r>
-              <a:rPr lang="ko-KR" altLang="en-US" sz="2400" dirty="0">
+              <a:rPr lang="ko-KR" altLang="en-US" sz="1455" dirty="0">
                 <a:latin typeface="LG스마트체2.0 SemiBold" panose="020B0600000101010101" pitchFamily="50" charset="-127"/>
                 <a:ea typeface="LG스마트체2.0 SemiBold" panose="020B0600000101010101" pitchFamily="50" charset="-127"/>
               </a:rPr>
               <a:t>게임 진행 화면 </a:t>
             </a:r>
             <a:r>
-              <a:rPr lang="en-US" altLang="ko-KR" sz="2400" dirty="0">
+              <a:rPr lang="en-US" altLang="ko-KR" sz="1455" dirty="0">
                 <a:latin typeface="LG스마트체2.0 SemiBold" panose="020B0600000101010101" pitchFamily="50" charset="-127"/>
                 <a:ea typeface="LG스마트체2.0 SemiBold" panose="020B0600000101010101" pitchFamily="50" charset="-127"/>
               </a:rPr>
               <a:t>(</a:t>
             </a:r>
             <a:r>
-              <a:rPr lang="ko-KR" altLang="en-US" sz="2400" dirty="0">
+              <a:rPr lang="ko-KR" altLang="en-US" sz="1455" dirty="0">
                 <a:latin typeface="LG스마트체2.0 SemiBold" panose="020B0600000101010101" pitchFamily="50" charset="-127"/>
                 <a:ea typeface="LG스마트체2.0 SemiBold" panose="020B0600000101010101" pitchFamily="50" charset="-127"/>
               </a:rPr>
               <a:t>참가자</a:t>
             </a:r>
             <a:r>
-              <a:rPr lang="en-US" altLang="ko-KR" sz="2400" dirty="0">
+              <a:rPr lang="en-US" altLang="ko-KR" sz="1455" dirty="0">
                 <a:latin typeface="LG스마트체2.0 SemiBold" panose="020B0600000101010101" pitchFamily="50" charset="-127"/>
                 <a:ea typeface="LG스마트체2.0 SemiBold" panose="020B0600000101010101" pitchFamily="50" charset="-127"/>
               </a:rPr>
               <a:t>)</a:t>
             </a:r>
-            <a:endParaRPr lang="ko-KR" altLang="en-US" sz="2400" dirty="0">
+            <a:endParaRPr lang="ko-KR" altLang="en-US" sz="1455" dirty="0">
               <a:latin typeface="LG스마트체2.0 SemiBold" panose="020B0600000101010101" pitchFamily="50" charset="-127"/>
               <a:ea typeface="LG스마트체2.0 SemiBold" panose="020B0600000101010101" pitchFamily="50" charset="-127"/>
             </a:endParaRPr>
@@ -5483,18 +5467,18 @@
         </p:nvSpPr>
         <p:spPr>
           <a:xfrm>
-            <a:off x="6259102" y="6477000"/>
-            <a:ext cx="4320000" cy="872000"/>
+            <a:off x="3793395" y="4029365"/>
+            <a:ext cx="2618182" cy="528485"/>
           </a:xfrm>
           <a:prstGeom prst="rect">
             <a:avLst/>
           </a:prstGeom>
         </p:spPr>
         <p:txBody>
-          <a:bodyPr lIns="0" tIns="30480" rIns="0" bIns="0" rtlCol="0" anchor="ctr"/>
+          <a:bodyPr lIns="0" tIns="18473" rIns="0" bIns="0" rtlCol="0" anchor="ctr"/>
           <a:lstStyle/>
           <a:p>
-            <a:pPr marL="342900" lvl="0" indent="-342900" algn="just">
+            <a:pPr marL="207846" indent="-207846" algn="just">
               <a:lnSpc>
                 <a:spcPct val="99600"/>
               </a:lnSpc>
@@ -5502,7 +5486,7 @@
               <a:buChar char="•"/>
             </a:pPr>
             <a:r>
-              <a:rPr lang="ko-KR" altLang="en-US" sz="2000" dirty="0">
+              <a:rPr lang="ko-KR" altLang="en-US" sz="1212" dirty="0">
                 <a:solidFill>
                   <a:srgbClr val="333333"/>
                 </a:solidFill>
@@ -5512,7 +5496,7 @@
               </a:rPr>
               <a:t>캔버스에 그림을 그려 단어를 표현</a:t>
             </a:r>
-            <a:endParaRPr lang="en-US" altLang="ko-KR" sz="2000" dirty="0">
+            <a:endParaRPr lang="en-US" altLang="ko-KR" sz="1212" dirty="0">
               <a:solidFill>
                 <a:srgbClr val="333333"/>
               </a:solidFill>
@@ -5522,7 +5506,7 @@
             </a:endParaRPr>
           </a:p>
           <a:p>
-            <a:pPr marL="342900" lvl="0" indent="-342900" algn="just">
+            <a:pPr marL="207846" indent="-207846" algn="just">
               <a:lnSpc>
                 <a:spcPct val="99600"/>
               </a:lnSpc>
@@ -5530,7 +5514,7 @@
               <a:buChar char="•"/>
             </a:pPr>
             <a:r>
-              <a:rPr lang="ko-KR" altLang="en-US" sz="2000" dirty="0">
+              <a:rPr lang="ko-KR" altLang="en-US" sz="1212" dirty="0">
                 <a:solidFill>
                   <a:srgbClr val="333333"/>
                 </a:solidFill>
@@ -5540,7 +5524,7 @@
               </a:rPr>
               <a:t>참가자 답안 확인 후 정답 판정</a:t>
             </a:r>
-            <a:endParaRPr lang="en-US" altLang="ko-KR" sz="2000" dirty="0">
+            <a:endParaRPr lang="en-US" altLang="ko-KR" sz="1212" dirty="0">
               <a:solidFill>
                 <a:srgbClr val="333333"/>
               </a:solidFill>
@@ -5565,18 +5549,18 @@
         </p:nvSpPr>
         <p:spPr>
           <a:xfrm>
-            <a:off x="749301" y="6477000"/>
-            <a:ext cx="4320000" cy="872000"/>
+            <a:off x="454122" y="4029365"/>
+            <a:ext cx="2618182" cy="528485"/>
           </a:xfrm>
           <a:prstGeom prst="rect">
             <a:avLst/>
           </a:prstGeom>
         </p:spPr>
         <p:txBody>
-          <a:bodyPr lIns="0" tIns="30480" rIns="0" bIns="0" rtlCol="0" anchor="ctr"/>
+          <a:bodyPr lIns="0" tIns="18473" rIns="0" bIns="0" rtlCol="0" anchor="ctr"/>
           <a:lstStyle/>
           <a:p>
-            <a:pPr marL="342900" lvl="0" indent="-342900" algn="just">
+            <a:pPr marL="207846" indent="-207846" algn="just">
               <a:lnSpc>
                 <a:spcPct val="99600"/>
               </a:lnSpc>
@@ -5584,7 +5568,7 @@
               <a:buChar char="•"/>
             </a:pPr>
             <a:r>
-              <a:rPr lang="ko-KR" altLang="en-US" sz="2000" dirty="0">
+              <a:rPr lang="ko-KR" altLang="en-US" sz="1212" dirty="0">
                 <a:solidFill>
                   <a:srgbClr val="333333"/>
                 </a:solidFill>
@@ -5594,7 +5578,7 @@
               </a:rPr>
               <a:t>출제자의 그림을 실시간으로 확인</a:t>
             </a:r>
-            <a:endParaRPr lang="en-US" altLang="ko-KR" sz="2000" dirty="0">
+            <a:endParaRPr lang="en-US" altLang="ko-KR" sz="1212" dirty="0">
               <a:solidFill>
                 <a:srgbClr val="333333"/>
               </a:solidFill>
@@ -5604,7 +5588,7 @@
             </a:endParaRPr>
           </a:p>
           <a:p>
-            <a:pPr marL="342900" lvl="0" indent="-342900" algn="just">
+            <a:pPr marL="207846" indent="-207846" algn="just">
               <a:lnSpc>
                 <a:spcPct val="99600"/>
               </a:lnSpc>
@@ -5612,7 +5596,7 @@
               <a:buChar char="•"/>
             </a:pPr>
             <a:r>
-              <a:rPr lang="ko-KR" altLang="en-US" sz="2000" dirty="0">
+              <a:rPr lang="ko-KR" altLang="en-US" sz="1212" dirty="0">
                 <a:solidFill>
                   <a:srgbClr val="333333"/>
                 </a:solidFill>
@@ -5622,7 +5606,7 @@
               </a:rPr>
               <a:t>입력창을 통해 정답 제출</a:t>
             </a:r>
-            <a:endParaRPr lang="en-US" altLang="ko-KR" sz="2000" dirty="0">
+            <a:endParaRPr lang="en-US" altLang="ko-KR" sz="1212" dirty="0">
               <a:solidFill>
                 <a:srgbClr val="333333"/>
               </a:solidFill>
@@ -5647,18 +5631,18 @@
         </p:nvSpPr>
         <p:spPr>
           <a:xfrm>
-            <a:off x="6280810" y="13493904"/>
-            <a:ext cx="4320000" cy="872000"/>
+            <a:off x="3806551" y="8425197"/>
+            <a:ext cx="2618182" cy="528485"/>
           </a:xfrm>
           <a:prstGeom prst="rect">
             <a:avLst/>
           </a:prstGeom>
         </p:spPr>
         <p:txBody>
-          <a:bodyPr lIns="0" tIns="30480" rIns="0" bIns="0" rtlCol="0" anchor="ctr"/>
+          <a:bodyPr lIns="0" tIns="18473" rIns="0" bIns="0" rtlCol="0" anchor="ctr"/>
           <a:lstStyle/>
           <a:p>
-            <a:pPr marL="342900" lvl="0" indent="-342900" algn="just">
+            <a:pPr marL="207846" indent="-207846" algn="just">
               <a:lnSpc>
                 <a:spcPct val="99600"/>
               </a:lnSpc>
@@ -5666,7 +5650,7 @@
               <a:buChar char="•"/>
             </a:pPr>
             <a:r>
-              <a:rPr lang="ko-KR" altLang="en-US" sz="2000" dirty="0">
+              <a:rPr lang="ko-KR" altLang="en-US" sz="1212" dirty="0">
                 <a:solidFill>
                   <a:srgbClr val="333333"/>
                 </a:solidFill>
@@ -5676,48 +5660,7 @@
               </a:rPr>
               <a:t>모든 라운드 종료 후 점수 확인</a:t>
             </a:r>
-            <a:endParaRPr lang="en-US" altLang="ko-KR" sz="2000" dirty="0">
-              <a:solidFill>
-                <a:srgbClr val="333333"/>
-              </a:solidFill>
-              <a:latin typeface="LG스마트체2.0 Light" panose="020B0600000101010101" pitchFamily="50" charset="-127"/>
-              <a:ea typeface="LG스마트체2.0 Light" panose="020B0600000101010101" pitchFamily="50" charset="-127"/>
-              <a:cs typeface="Work Sans Regular"/>
-            </a:endParaRPr>
-          </a:p>
-        </p:txBody>
-      </p:sp>
-      <p:sp>
-        <p:nvSpPr>
-          <p:cNvPr id="65" name="TextBox 18">
-            <a:extLst>
-              <a:ext uri="{FF2B5EF4-FFF2-40B4-BE49-F238E27FC236}">
-                <a16:creationId xmlns:a16="http://schemas.microsoft.com/office/drawing/2014/main" id="{A67F020A-BA96-99BF-BB28-40E8AD2B0F76}"/>
-              </a:ext>
-            </a:extLst>
-          </p:cNvPr>
-          <p:cNvSpPr txBox="1"/>
-          <p:nvPr/>
-        </p:nvSpPr>
-        <p:spPr>
-          <a:xfrm>
-            <a:off x="771009" y="13682200"/>
-            <a:ext cx="4320000" cy="872000"/>
-          </a:xfrm>
-          <a:prstGeom prst="rect">
-            <a:avLst/>
-          </a:prstGeom>
-        </p:spPr>
-        <p:txBody>
-          <a:bodyPr lIns="0" tIns="30480" rIns="0" bIns="0" rtlCol="0" anchor="ctr"/>
-          <a:lstStyle/>
-          <a:p>
-            <a:pPr lvl="0" algn="ctr">
-              <a:lnSpc>
-                <a:spcPct val="99600"/>
-              </a:lnSpc>
-            </a:pPr>
-            <a:endParaRPr lang="en-US" altLang="ko-KR" sz="2400" dirty="0">
+            <a:endParaRPr lang="en-US" altLang="ko-KR" sz="1212" dirty="0">
               <a:solidFill>
                 <a:srgbClr val="333333"/>
               </a:solidFill>
@@ -5756,8 +5699,8 @@
         </p:blipFill>
         <p:spPr>
           <a:xfrm>
-            <a:off x="736600" y="3990900"/>
-            <a:ext cx="4320000" cy="2477346"/>
+            <a:off x="446424" y="2522636"/>
+            <a:ext cx="2618182" cy="1501422"/>
           </a:xfrm>
           <a:prstGeom prst="rect">
             <a:avLst/>
@@ -5792,8 +5735,8 @@
         </p:blipFill>
         <p:spPr>
           <a:xfrm>
-            <a:off x="6246401" y="3956764"/>
-            <a:ext cx="4320000" cy="2513828"/>
+            <a:off x="3785697" y="2501948"/>
+            <a:ext cx="2618182" cy="1523532"/>
           </a:xfrm>
           <a:prstGeom prst="rect">
             <a:avLst/>
@@ -5815,7 +5758,7 @@
           <p:nvPr/>
         </p:nvPicPr>
         <p:blipFill>
-          <a:blip r:embed="rId10">
+          <a:blip r:embed="rId10" cstate="print">
             <a:extLst>
               <a:ext uri="{28A0092B-C50C-407E-A947-70E740481C1C}">
                 <a14:useLocalDpi xmlns:a14="http://schemas.microsoft.com/office/drawing/2010/main" val="0"/>
@@ -5828,8 +5771,8 @@
         </p:blipFill>
         <p:spPr>
           <a:xfrm>
-            <a:off x="758308" y="10901325"/>
-            <a:ext cx="4320000" cy="2548125"/>
+            <a:off x="459581" y="6853937"/>
+            <a:ext cx="2618182" cy="1544318"/>
           </a:xfrm>
           <a:prstGeom prst="rect">
             <a:avLst/>
@@ -5851,7 +5794,7 @@
           <p:nvPr/>
         </p:nvPicPr>
         <p:blipFill>
-          <a:blip r:embed="rId11">
+          <a:blip r:embed="rId11" cstate="print">
             <a:extLst>
               <a:ext uri="{28A0092B-C50C-407E-A947-70E740481C1C}">
                 <a14:useLocalDpi xmlns:a14="http://schemas.microsoft.com/office/drawing/2010/main" val="0"/>
@@ -5864,8 +5807,8 @@
         </p:blipFill>
         <p:spPr>
           <a:xfrm>
-            <a:off x="6277634" y="10894821"/>
-            <a:ext cx="4320000" cy="2587563"/>
+            <a:off x="3804627" y="6849995"/>
+            <a:ext cx="2618182" cy="1568220"/>
           </a:xfrm>
           <a:prstGeom prst="rect">
             <a:avLst/>
@@ -5886,8 +5829,8 @@
         </p:nvSpPr>
         <p:spPr>
           <a:xfrm>
-            <a:off x="6277634" y="10285221"/>
-            <a:ext cx="4320000" cy="642255"/>
+            <a:off x="3804627" y="6480542"/>
+            <a:ext cx="2618182" cy="389245"/>
           </a:xfrm>
           <a:prstGeom prst="rect">
             <a:avLst/>
@@ -5921,14 +5864,14 @@
           <a:p>
             <a:pPr algn="ctr"/>
             <a:r>
-              <a:rPr lang="en-US" altLang="ko-KR" sz="2400" dirty="0">
+              <a:rPr lang="en-US" altLang="ko-KR" sz="1455" dirty="0">
                 <a:latin typeface="LG스마트체2.0 SemiBold" panose="020B0600000101010101" pitchFamily="50" charset="-127"/>
                 <a:ea typeface="LG스마트체2.0 SemiBold" panose="020B0600000101010101" pitchFamily="50" charset="-127"/>
               </a:rPr>
               <a:t>8. </a:t>
             </a:r>
             <a:r>
-              <a:rPr lang="ko-KR" altLang="en-US" sz="2400" dirty="0">
+              <a:rPr lang="ko-KR" altLang="en-US" sz="1455" dirty="0">
                 <a:latin typeface="LG스마트체2.0 SemiBold" panose="020B0600000101010101" pitchFamily="50" charset="-127"/>
                 <a:ea typeface="LG스마트체2.0 SemiBold" panose="020B0600000101010101" pitchFamily="50" charset="-127"/>
               </a:rPr>
@@ -5951,8 +5894,8 @@
         </p:nvSpPr>
         <p:spPr>
           <a:xfrm>
-            <a:off x="771009" y="10305497"/>
-            <a:ext cx="4320000" cy="642255"/>
+            <a:off x="467278" y="6492829"/>
+            <a:ext cx="2618182" cy="389245"/>
           </a:xfrm>
           <a:prstGeom prst="rect">
             <a:avLst/>
@@ -5986,14 +5929,14 @@
           <a:p>
             <a:pPr algn="ctr"/>
             <a:r>
-              <a:rPr lang="en-US" altLang="ko-KR" sz="2400" dirty="0">
+              <a:rPr lang="en-US" altLang="ko-KR" sz="1455" dirty="0">
                 <a:latin typeface="LG스마트체2.0 SemiBold" panose="020B0600000101010101" pitchFamily="50" charset="-127"/>
                 <a:ea typeface="LG스마트체2.0 SemiBold" panose="020B0600000101010101" pitchFamily="50" charset="-127"/>
               </a:rPr>
               <a:t>7. </a:t>
             </a:r>
             <a:r>
-              <a:rPr lang="ko-KR" altLang="en-US" sz="2400" dirty="0">
+              <a:rPr lang="ko-KR" altLang="en-US" sz="1455" dirty="0">
                 <a:latin typeface="LG스마트체2.0 SemiBold" panose="020B0600000101010101" pitchFamily="50" charset="-127"/>
                 <a:ea typeface="LG스마트체2.0 SemiBold" panose="020B0600000101010101" pitchFamily="50" charset="-127"/>
               </a:rPr>
@@ -6016,18 +5959,18 @@
         </p:nvSpPr>
         <p:spPr>
           <a:xfrm>
-            <a:off x="750334" y="13493904"/>
-            <a:ext cx="4320000" cy="872000"/>
+            <a:off x="454748" y="8425197"/>
+            <a:ext cx="2618182" cy="528485"/>
           </a:xfrm>
           <a:prstGeom prst="rect">
             <a:avLst/>
           </a:prstGeom>
         </p:spPr>
         <p:txBody>
-          <a:bodyPr lIns="0" tIns="30480" rIns="0" bIns="0" rtlCol="0" anchor="ctr"/>
+          <a:bodyPr lIns="0" tIns="18473" rIns="0" bIns="0" rtlCol="0" anchor="ctr"/>
           <a:lstStyle/>
           <a:p>
-            <a:pPr marL="342900" lvl="0" indent="-342900" algn="just">
+            <a:pPr marL="207846" indent="-207846" algn="just">
               <a:lnSpc>
                 <a:spcPct val="99600"/>
               </a:lnSpc>
@@ -6035,7 +5978,7 @@
               <a:buChar char="•"/>
             </a:pPr>
             <a:r>
-              <a:rPr lang="ko-KR" altLang="en-US" sz="2000" dirty="0">
+              <a:rPr lang="ko-KR" altLang="en-US" sz="1212" dirty="0">
                 <a:solidFill>
                   <a:srgbClr val="333333"/>
                 </a:solidFill>
@@ -6046,7 +5989,7 @@
               <a:t>정답 성공</a:t>
             </a:r>
             <a:r>
-              <a:rPr lang="en-US" altLang="ko-KR" sz="2000" dirty="0">
+              <a:rPr lang="en-US" altLang="ko-KR" sz="1212" dirty="0">
                 <a:solidFill>
                   <a:srgbClr val="333333"/>
                 </a:solidFill>
@@ -6057,7 +6000,7 @@
               <a:t>: </a:t>
             </a:r>
             <a:r>
-              <a:rPr lang="ko-KR" altLang="en-US" sz="2000" dirty="0">
+              <a:rPr lang="ko-KR" altLang="en-US" sz="1212" dirty="0">
                 <a:solidFill>
                   <a:srgbClr val="333333"/>
                 </a:solidFill>
@@ -6068,7 +6011,7 @@
               <a:t>다음 출제자 </a:t>
             </a:r>
             <a:r>
-              <a:rPr lang="en-US" altLang="ko-KR" sz="2000" dirty="0">
+              <a:rPr lang="en-US" altLang="ko-KR" sz="1212" dirty="0">
                 <a:solidFill>
                   <a:srgbClr val="333333"/>
                 </a:solidFill>
@@ -6079,7 +6022,7 @@
               <a:t>= </a:t>
             </a:r>
             <a:r>
-              <a:rPr lang="ko-KR" altLang="en-US" sz="2000" dirty="0">
+              <a:rPr lang="ko-KR" altLang="en-US" sz="1212" dirty="0">
                 <a:solidFill>
                   <a:srgbClr val="333333"/>
                 </a:solidFill>
@@ -6089,7 +6032,7 @@
               </a:rPr>
               <a:t>정답자</a:t>
             </a:r>
-            <a:endParaRPr lang="en-US" altLang="ko-KR" sz="2000" dirty="0">
+            <a:endParaRPr lang="en-US" altLang="ko-KR" sz="1212" dirty="0">
               <a:solidFill>
                 <a:srgbClr val="333333"/>
               </a:solidFill>
@@ -6099,7 +6042,7 @@
             </a:endParaRPr>
           </a:p>
           <a:p>
-            <a:pPr marL="342900" lvl="0" indent="-342900" algn="just">
+            <a:pPr marL="207846" indent="-207846" algn="just">
               <a:lnSpc>
                 <a:spcPct val="99600"/>
               </a:lnSpc>
@@ -6107,7 +6050,7 @@
               <a:buChar char="•"/>
             </a:pPr>
             <a:r>
-              <a:rPr lang="ko-KR" altLang="en-US" sz="2000" dirty="0">
+              <a:rPr lang="ko-KR" altLang="en-US" sz="1212" dirty="0">
                 <a:solidFill>
                   <a:srgbClr val="333333"/>
                 </a:solidFill>
@@ -6118,7 +6061,7 @@
               <a:t>정답 실패</a:t>
             </a:r>
             <a:r>
-              <a:rPr lang="en-US" altLang="ko-KR" sz="2000" dirty="0">
+              <a:rPr lang="en-US" altLang="ko-KR" sz="1212" dirty="0">
                 <a:solidFill>
                   <a:srgbClr val="333333"/>
                 </a:solidFill>
@@ -6129,7 +6072,7 @@
               <a:t>: </a:t>
             </a:r>
             <a:r>
-              <a:rPr lang="ko-KR" altLang="en-US" sz="2000" dirty="0">
+              <a:rPr lang="ko-KR" altLang="en-US" sz="1212" dirty="0">
                 <a:solidFill>
                   <a:srgbClr val="333333"/>
                 </a:solidFill>
@@ -6139,7 +6082,7 @@
               </a:rPr>
               <a:t>출제자 유지</a:t>
             </a:r>
-            <a:endParaRPr lang="en-US" altLang="ko-KR" sz="2000" dirty="0">
+            <a:endParaRPr lang="en-US" altLang="ko-KR" sz="1212" dirty="0">
               <a:solidFill>
                 <a:srgbClr val="333333"/>
               </a:solidFill>
@@ -6179,8 +6122,8 @@
         </p:blipFill>
         <p:spPr>
           <a:xfrm>
-            <a:off x="971550" y="7771127"/>
-            <a:ext cx="9410700" cy="801518"/>
+            <a:off x="588819" y="4880647"/>
+            <a:ext cx="5703455" cy="485768"/>
           </a:xfrm>
           <a:prstGeom prst="rect">
             <a:avLst/>
@@ -6201,15 +6144,15 @@
         </p:nvSpPr>
         <p:spPr>
           <a:xfrm>
-            <a:off x="7486650" y="9320952"/>
-            <a:ext cx="3048000" cy="508848"/>
+            <a:off x="4537365" y="5819935"/>
+            <a:ext cx="1847273" cy="308393"/>
           </a:xfrm>
           <a:prstGeom prst="rect">
             <a:avLst/>
           </a:prstGeom>
         </p:spPr>
         <p:txBody>
-          <a:bodyPr lIns="0" tIns="30480" rIns="0" bIns="0" rtlCol="0" anchor="ctr"/>
+          <a:bodyPr lIns="0" tIns="18473" rIns="0" bIns="0" rtlCol="0" anchor="ctr"/>
           <a:lstStyle/>
           <a:p>
             <a:pPr lvl="0" algn="ctr">
@@ -6218,7 +6161,7 @@
               </a:lnSpc>
             </a:pPr>
             <a:r>
-              <a:rPr lang="ko-KR" altLang="en-US" sz="2000" dirty="0">
+              <a:rPr lang="ko-KR" altLang="en-US" sz="1212" dirty="0">
                 <a:solidFill>
                   <a:srgbClr val="FF5D5D"/>
                 </a:solidFill>
@@ -6229,7 +6172,7 @@
               <a:t>정답 실패</a:t>
             </a:r>
             <a:r>
-              <a:rPr lang="en-US" altLang="ko-KR" sz="2000" dirty="0">
+              <a:rPr lang="en-US" altLang="ko-KR" sz="1212" dirty="0">
                 <a:solidFill>
                   <a:srgbClr val="FF5D5D"/>
                 </a:solidFill>
@@ -6240,7 +6183,7 @@
               <a:t> ⇒ </a:t>
             </a:r>
             <a:r>
-              <a:rPr lang="ko-KR" altLang="en-US" sz="2000" dirty="0">
+              <a:rPr lang="ko-KR" altLang="en-US" sz="1212" dirty="0">
                 <a:solidFill>
                   <a:srgbClr val="FF5D5D"/>
                 </a:solidFill>
@@ -6251,7 +6194,7 @@
               <a:t>출제자 </a:t>
             </a:r>
             <a:r>
-              <a:rPr lang="en-US" altLang="ko-KR" sz="2000" dirty="0">
+              <a:rPr lang="en-US" altLang="ko-KR" sz="1212" dirty="0">
                 <a:solidFill>
                   <a:srgbClr val="FF5D5D"/>
                 </a:solidFill>
@@ -6262,7 +6205,7 @@
               <a:t>-1</a:t>
             </a:r>
             <a:r>
-              <a:rPr lang="ko-KR" altLang="en-US" sz="2000" dirty="0">
+              <a:rPr lang="ko-KR" altLang="en-US" sz="1212" dirty="0">
                 <a:solidFill>
                   <a:srgbClr val="FF5D5D"/>
                 </a:solidFill>
@@ -6272,7 +6215,7 @@
               </a:rPr>
               <a:t>점</a:t>
             </a:r>
-            <a:endParaRPr lang="en-US" altLang="ko-KR" sz="2000" dirty="0">
+            <a:endParaRPr lang="en-US" altLang="ko-KR" sz="1212" dirty="0">
               <a:solidFill>
                 <a:srgbClr val="FF5D5D"/>
               </a:solidFill>
@@ -6297,15 +6240,15 @@
         </p:nvSpPr>
         <p:spPr>
           <a:xfrm>
-            <a:off x="6426202" y="8575205"/>
-            <a:ext cx="3048000" cy="872000"/>
+            <a:off x="3894668" y="5367968"/>
+            <a:ext cx="1847273" cy="528485"/>
           </a:xfrm>
           <a:prstGeom prst="rect">
             <a:avLst/>
           </a:prstGeom>
         </p:spPr>
         <p:txBody>
-          <a:bodyPr lIns="0" tIns="30480" rIns="0" bIns="0" rtlCol="0" anchor="ctr"/>
+          <a:bodyPr lIns="0" tIns="18473" rIns="0" bIns="0" rtlCol="0" anchor="ctr"/>
           <a:lstStyle/>
           <a:p>
             <a:pPr lvl="0" algn="just">
@@ -6314,7 +6257,7 @@
               </a:lnSpc>
             </a:pPr>
             <a:r>
-              <a:rPr lang="ko-KR" altLang="en-US" sz="2000" dirty="0">
+              <a:rPr lang="ko-KR" altLang="en-US" sz="1212" dirty="0">
                 <a:solidFill>
                   <a:schemeClr val="accent6"/>
                 </a:solidFill>
@@ -6325,7 +6268,7 @@
               <a:t>출제자 </a:t>
             </a:r>
             <a:r>
-              <a:rPr lang="en-US" altLang="ko-KR" sz="2000" dirty="0">
+              <a:rPr lang="en-US" altLang="ko-KR" sz="1212" dirty="0">
                 <a:solidFill>
                   <a:schemeClr val="accent6"/>
                 </a:solidFill>
@@ -6336,7 +6279,7 @@
               <a:t>+1</a:t>
             </a:r>
             <a:r>
-              <a:rPr lang="ko-KR" altLang="en-US" sz="2000" dirty="0">
+              <a:rPr lang="ko-KR" altLang="en-US" sz="1212" dirty="0">
                 <a:solidFill>
                   <a:schemeClr val="accent6"/>
                 </a:solidFill>
@@ -6347,7 +6290,7 @@
               <a:t>점</a:t>
             </a:r>
             <a:r>
-              <a:rPr lang="en-US" altLang="ko-KR" sz="2000" dirty="0">
+              <a:rPr lang="en-US" altLang="ko-KR" sz="1212" dirty="0">
                 <a:solidFill>
                   <a:schemeClr val="accent6"/>
                 </a:solidFill>
@@ -6358,7 +6301,7 @@
               <a:t> / </a:t>
             </a:r>
             <a:r>
-              <a:rPr lang="ko-KR" altLang="en-US" sz="2000" dirty="0">
+              <a:rPr lang="ko-KR" altLang="en-US" sz="1212" dirty="0">
                 <a:solidFill>
                   <a:schemeClr val="accent6"/>
                 </a:solidFill>
@@ -6369,7 +6312,7 @@
               <a:t>참가자 </a:t>
             </a:r>
             <a:r>
-              <a:rPr lang="en-US" altLang="ko-KR" sz="2000" dirty="0">
+              <a:rPr lang="en-US" altLang="ko-KR" sz="1212" dirty="0">
                 <a:solidFill>
                   <a:schemeClr val="accent6"/>
                 </a:solidFill>
@@ -6380,7 +6323,7 @@
               <a:t>+2</a:t>
             </a:r>
             <a:r>
-              <a:rPr lang="ko-KR" altLang="en-US" sz="2000" dirty="0">
+              <a:rPr lang="ko-KR" altLang="en-US" sz="1212" dirty="0">
                 <a:solidFill>
                   <a:schemeClr val="accent6"/>
                 </a:solidFill>
@@ -6390,7 +6333,7 @@
               </a:rPr>
               <a:t>점</a:t>
             </a:r>
-            <a:endParaRPr lang="en-US" altLang="ko-KR" sz="2000" dirty="0">
+            <a:endParaRPr lang="en-US" altLang="ko-KR" sz="1212" dirty="0">
               <a:solidFill>
                 <a:schemeClr val="accent6"/>
               </a:solidFill>
@@ -6415,15 +6358,15 @@
         </p:nvSpPr>
         <p:spPr>
           <a:xfrm>
-            <a:off x="1841500" y="8575205"/>
-            <a:ext cx="3048000" cy="872000"/>
+            <a:off x="1116060" y="5367968"/>
+            <a:ext cx="1847273" cy="528485"/>
           </a:xfrm>
           <a:prstGeom prst="rect">
             <a:avLst/>
           </a:prstGeom>
         </p:spPr>
         <p:txBody>
-          <a:bodyPr lIns="0" tIns="30480" rIns="0" bIns="0" rtlCol="0" anchor="ctr"/>
+          <a:bodyPr lIns="0" tIns="18473" rIns="0" bIns="0" rtlCol="0" anchor="ctr"/>
           <a:lstStyle/>
           <a:p>
             <a:pPr lvl="0" algn="just">
@@ -6432,7 +6375,7 @@
               </a:lnSpc>
             </a:pPr>
             <a:r>
-              <a:rPr lang="ko-KR" altLang="en-US" sz="2000" dirty="0">
+              <a:rPr lang="ko-KR" altLang="en-US" sz="1212" dirty="0">
                 <a:solidFill>
                   <a:schemeClr val="accent1"/>
                 </a:solidFill>
@@ -6443,7 +6386,7 @@
               <a:t>출제자 </a:t>
             </a:r>
             <a:r>
-              <a:rPr lang="en-US" altLang="ko-KR" sz="2000" dirty="0">
+              <a:rPr lang="en-US" altLang="ko-KR" sz="1212" dirty="0">
                 <a:solidFill>
                   <a:schemeClr val="accent1"/>
                 </a:solidFill>
@@ -6454,7 +6397,7 @@
               <a:t>+2</a:t>
             </a:r>
             <a:r>
-              <a:rPr lang="ko-KR" altLang="en-US" sz="2000" dirty="0">
+              <a:rPr lang="ko-KR" altLang="en-US" sz="1212" dirty="0">
                 <a:solidFill>
                   <a:schemeClr val="accent1"/>
                 </a:solidFill>
@@ -6465,7 +6408,7 @@
               <a:t>점</a:t>
             </a:r>
             <a:r>
-              <a:rPr lang="en-US" altLang="ko-KR" sz="2000" dirty="0">
+              <a:rPr lang="en-US" altLang="ko-KR" sz="1212" dirty="0">
                 <a:solidFill>
                   <a:schemeClr val="accent1"/>
                 </a:solidFill>
@@ -6476,7 +6419,7 @@
               <a:t> / </a:t>
             </a:r>
             <a:r>
-              <a:rPr lang="ko-KR" altLang="en-US" sz="2000" dirty="0">
+              <a:rPr lang="ko-KR" altLang="en-US" sz="1212" dirty="0">
                 <a:solidFill>
                   <a:schemeClr val="accent1"/>
                 </a:solidFill>
@@ -6487,7 +6430,7 @@
               <a:t>참가자 </a:t>
             </a:r>
             <a:r>
-              <a:rPr lang="en-US" altLang="ko-KR" sz="2000" dirty="0">
+              <a:rPr lang="en-US" altLang="ko-KR" sz="1212" dirty="0">
                 <a:solidFill>
                   <a:schemeClr val="accent1"/>
                 </a:solidFill>
@@ -6498,7 +6441,7 @@
               <a:t>+3</a:t>
             </a:r>
             <a:r>
-              <a:rPr lang="ko-KR" altLang="en-US" sz="2000" dirty="0">
+              <a:rPr lang="ko-KR" altLang="en-US" sz="1212" dirty="0">
                 <a:solidFill>
                   <a:schemeClr val="accent1"/>
                 </a:solidFill>
@@ -6508,7 +6451,7 @@
               </a:rPr>
               <a:t>점</a:t>
             </a:r>
-            <a:endParaRPr lang="en-US" altLang="ko-KR" sz="2000" dirty="0">
+            <a:endParaRPr lang="en-US" altLang="ko-KR" sz="1212" dirty="0">
               <a:solidFill>
                 <a:schemeClr val="accent1"/>
               </a:solidFill>
@@ -6535,8 +6478,8 @@
         </p:nvCxnSpPr>
         <p:spPr>
           <a:xfrm flipH="1">
-            <a:off x="5657850" y="8456605"/>
-            <a:ext cx="0" cy="509171"/>
+            <a:off x="3429000" y="5296089"/>
+            <a:ext cx="0" cy="308588"/>
           </a:xfrm>
           <a:prstGeom prst="line">
             <a:avLst/>
@@ -6580,8 +6523,8 @@
         </p:nvCxnSpPr>
         <p:spPr>
           <a:xfrm>
-            <a:off x="1016000" y="8727605"/>
-            <a:ext cx="4641850" cy="0"/>
+            <a:off x="615758" y="5460331"/>
+            <a:ext cx="2813242" cy="0"/>
           </a:xfrm>
           <a:prstGeom prst="bentConnector3">
             <a:avLst/>
@@ -6624,8 +6567,8 @@
         </p:nvCxnSpPr>
         <p:spPr>
           <a:xfrm>
-            <a:off x="5664200" y="8727605"/>
-            <a:ext cx="4641850" cy="0"/>
+            <a:off x="3432849" y="5460331"/>
+            <a:ext cx="2813242" cy="0"/>
           </a:xfrm>
           <a:prstGeom prst="bentConnector3">
             <a:avLst/>
@@ -6667,8 +6610,8 @@
         </p:nvCxnSpPr>
         <p:spPr>
           <a:xfrm>
-            <a:off x="10299700" y="8456605"/>
-            <a:ext cx="6350" cy="864347"/>
+            <a:off x="6242243" y="5296088"/>
+            <a:ext cx="3848" cy="523847"/>
           </a:xfrm>
           <a:prstGeom prst="line">
             <a:avLst/>
@@ -6713,8 +6656,8 @@
         </p:nvCxnSpPr>
         <p:spPr>
           <a:xfrm flipH="1">
-            <a:off x="1009650" y="8456605"/>
-            <a:ext cx="0" cy="509171"/>
+            <a:off x="611909" y="5296089"/>
+            <a:ext cx="0" cy="308588"/>
           </a:xfrm>
           <a:prstGeom prst="line">
             <a:avLst/>
@@ -6758,15 +6701,15 @@
         </p:nvSpPr>
         <p:spPr>
           <a:xfrm>
-            <a:off x="330200" y="1430020"/>
-            <a:ext cx="10680700" cy="474980"/>
+            <a:off x="200122" y="882073"/>
+            <a:ext cx="6473152" cy="287867"/>
           </a:xfrm>
           <a:prstGeom prst="rect">
             <a:avLst/>
           </a:prstGeom>
         </p:spPr>
         <p:txBody>
-          <a:bodyPr lIns="0" tIns="30480" rIns="0" bIns="0" rtlCol="0" anchor="t"/>
+          <a:bodyPr lIns="0" tIns="18473" rIns="0" bIns="0" rtlCol="0" anchor="t"/>
           <a:lstStyle/>
           <a:p>
             <a:pPr lvl="0" algn="r">
@@ -6775,7 +6718,7 @@
               </a:lnSpc>
             </a:pPr>
             <a:r>
-              <a:rPr lang="ko-KR" altLang="en-US" sz="2400" dirty="0" err="1">
+              <a:rPr lang="ko-KR" altLang="en-US" sz="1455" dirty="0" err="1">
                 <a:solidFill>
                   <a:srgbClr val="FAFAFA"/>
                 </a:solidFill>
@@ -6786,7 +6729,7 @@
               <a:t>쿵야</a:t>
             </a:r>
             <a:r>
-              <a:rPr lang="ko-KR" altLang="en-US" sz="2400" dirty="0">
+              <a:rPr lang="ko-KR" altLang="en-US" sz="1455" dirty="0">
                 <a:solidFill>
                   <a:srgbClr val="FAFAFA"/>
                 </a:solidFill>
@@ -6797,7 +6740,7 @@
               <a:t> 팀</a:t>
             </a:r>
             <a:r>
-              <a:rPr lang="en-US" altLang="ko-KR" sz="2400" dirty="0">
+              <a:rPr lang="en-US" altLang="ko-KR" sz="1455" dirty="0">
                 <a:solidFill>
                   <a:srgbClr val="FAFAFA"/>
                 </a:solidFill>
@@ -6808,7 +6751,7 @@
               <a:t>(</a:t>
             </a:r>
             <a:r>
-              <a:rPr lang="ko-KR" altLang="en-US" sz="2400" b="0" i="0" u="none" strike="noStrike" dirty="0" err="1">
+              <a:rPr lang="ko-KR" altLang="en-US" sz="1455" dirty="0" err="1">
                 <a:solidFill>
                   <a:srgbClr val="FAFAFA"/>
                 </a:solidFill>
@@ -6819,7 +6762,7 @@
               <a:t>엄제원</a:t>
             </a:r>
             <a:r>
-              <a:rPr lang="en-US" altLang="ko-KR" sz="2400" b="0" i="0" u="none" strike="noStrike" dirty="0">
+              <a:rPr lang="en-US" altLang="ko-KR" sz="1455" dirty="0">
                 <a:solidFill>
                   <a:srgbClr val="FAFAFA"/>
                 </a:solidFill>
@@ -6830,7 +6773,7 @@
               <a:t>, </a:t>
             </a:r>
             <a:r>
-              <a:rPr lang="ko-KR" altLang="en-US" sz="2400" b="0" i="0" u="none" strike="noStrike" dirty="0">
+              <a:rPr lang="ko-KR" altLang="en-US" sz="1455" dirty="0">
                 <a:solidFill>
                   <a:srgbClr val="FAFAFA"/>
                 </a:solidFill>
@@ -6841,7 +6784,7 @@
               <a:t>이경환</a:t>
             </a:r>
             <a:r>
-              <a:rPr lang="en-US" altLang="ko-KR" sz="2400" b="0" i="0" u="none" strike="noStrike" dirty="0">
+              <a:rPr lang="en-US" altLang="ko-KR" sz="1455" dirty="0">
                 <a:solidFill>
                   <a:srgbClr val="FAFAFA"/>
                 </a:solidFill>
@@ -6852,7 +6795,7 @@
               <a:t>, </a:t>
             </a:r>
             <a:r>
-              <a:rPr lang="ko-KR" altLang="en-US" sz="2400" b="0" i="0" u="none" strike="noStrike" dirty="0">
+              <a:rPr lang="ko-KR" altLang="en-US" sz="1455" dirty="0">
                 <a:solidFill>
                   <a:srgbClr val="FAFAFA"/>
                 </a:solidFill>
@@ -6863,7 +6806,7 @@
               <a:t>윤지원</a:t>
             </a:r>
             <a:r>
-              <a:rPr lang="en-US" altLang="ko-KR" sz="2400" b="0" i="0" u="none" strike="noStrike" dirty="0">
+              <a:rPr lang="en-US" altLang="ko-KR" sz="1455" dirty="0">
                 <a:solidFill>
                   <a:srgbClr val="FAFAFA"/>
                 </a:solidFill>
@@ -6873,7 +6816,7 @@
               </a:rPr>
               <a:t>)</a:t>
             </a:r>
-            <a:endParaRPr lang="en-US" sz="2400" b="0" i="0" u="none" strike="noStrike" dirty="0">
+            <a:endParaRPr lang="en-US" sz="1455" dirty="0">
               <a:solidFill>
                 <a:srgbClr val="FAFAFA"/>
               </a:solidFill>
